--- a/assets/figures-editable/c3-c4/c4-e30.pptx
+++ b/assets/figures-editable/c3-c4/c4-e30.pptx
@@ -3104,8 +3104,8 @@
         </p:nvSpPr>
         <p:spPr>
           <a:xfrm>
-            <a:off x="274320" y="137160"/>
-            <a:ext cx="11612880" cy="365760"/>
+            <a:off x="274320" y="118872"/>
+            <a:ext cx="11612880" cy="340105"/>
           </a:xfrm>
           <a:prstGeom prst="rect">
             <a:avLst/>
@@ -3114,7 +3114,7 @@
           <a:effectLst/>
         </p:spPr>
         <p:txBody>
-          <a:bodyPr wrap="square" lIns="27432" rIns="27432" tIns="18288" bIns="18288" anchor="ctr">
+          <a:bodyPr wrap="none" lIns="18288" rIns="18288" tIns="18288" bIns="18288" anchor="t">
             <a:spAutoFit/>
           </a:bodyPr>
           <a:lstStyle/>
@@ -3125,7 +3125,7 @@
               </a:spcAft>
             </a:pPr>
             <a:r>
-              <a:rPr sz="2100" b="0" i="0">
+              <a:rPr sz="1900" b="1" i="0">
                 <a:solidFill>
                   <a:srgbClr val="8EDBD4"/>
                 </a:solidFill>
@@ -3136,23 +3136,20 @@
           </a:p>
         </p:txBody>
       </p:sp>
-      <p:sp>
-        <p:nvSpPr>
-          <p:cNvPr id="3" name="C4-E30 rect 1" descr="sci-ppt:o001"/>
-          <p:cNvSpPr/>
+      <p:cxnSp>
+        <p:nvCxnSpPr>
+          <p:cNvPr id="3" name="C4-E30 line 1" descr="sci-ppt:o001"/>
+          <p:cNvCxnSpPr/>
           <p:nvPr/>
-        </p:nvSpPr>
-        <p:spPr>
-          <a:xfrm>
-            <a:off x="594360" y="1417320"/>
-            <a:ext cx="3200400" cy="1325880"/>
-          </a:xfrm>
-          <a:prstGeom prst="rect">
+        </p:nvCxnSpPr>
+        <p:spPr>
+          <a:xfrm>
+            <a:off x="914400" y="5029200"/>
+            <a:ext cx="5852160" cy="0"/>
+          </a:xfrm>
+          <a:prstGeom prst="line">
             <a:avLst/>
           </a:prstGeom>
-          <a:solidFill>
-            <a:srgbClr val="213E4B"/>
-          </a:solidFill>
           <a:ln w="19050">
             <a:solidFill>
               <a:srgbClr val="B4C7D2"/>
@@ -3160,95 +3157,21 @@
           </a:ln>
           <a:effectLst/>
         </p:spPr>
-        <p:txBody>
-          <a:bodyPr rtlCol="0" anchor="ctr"/>
-          <a:lstStyle/>
-          <a:p>
-            <a:pPr algn="ctr"/>
-          </a:p>
-        </p:txBody>
-      </p:sp>
-      <p:sp>
-        <p:nvSpPr>
-          <p:cNvPr id="4" name="C4-E30 text 2" descr="sci-ppt:o002"/>
-          <p:cNvSpPr txBox="1"/>
-          <p:nvPr/>
-        </p:nvSpPr>
-        <p:spPr>
-          <a:xfrm>
-            <a:off x="758952" y="1627632"/>
-            <a:ext cx="2871216" cy="914400"/>
-          </a:xfrm>
-          <a:prstGeom prst="rect">
-            <a:avLst/>
-          </a:prstGeom>
-          <a:noFill/>
-          <a:effectLst/>
-        </p:spPr>
-        <p:txBody>
-          <a:bodyPr wrap="square" lIns="27432" rIns="27432" tIns="18288" bIns="18288" anchor="ctr">
-            <a:spAutoFit/>
-          </a:bodyPr>
-          <a:lstStyle/>
-          <a:p>
-            <a:pPr algn="l">
-              <a:spcAft>
-                <a:spcPts val="0"/>
-              </a:spcAft>
-            </a:pPr>
-            <a:r>
-              <a:rPr sz="1800" b="0" i="0">
-                <a:solidFill>
-                  <a:srgbClr val="E7F0F3"/>
-                </a:solidFill>
-                <a:latin typeface="Arial"/>
-              </a:rPr>
-              <a:t>Incoming finite budgets</a:t>
-            </a:r>
-          </a:p>
-        </p:txBody>
-      </p:sp>
+      </p:cxnSp>
       <p:cxnSp>
         <p:nvCxnSpPr>
-          <p:cNvPr id="5" name="C4-E30 arrow 3" descr="sci-ppt:o003"/>
+          <p:cNvPr id="4" name="C4-E30 line 2" descr="sci-ppt:o002"/>
           <p:cNvCxnSpPr/>
           <p:nvPr/>
         </p:nvCxnSpPr>
         <p:spPr>
           <a:xfrm>
-            <a:off x="3794760" y="2057400"/>
-            <a:ext cx="640080" cy="0"/>
+            <a:off x="914400" y="1371600"/>
+            <a:ext cx="0" cy="3657600"/>
           </a:xfrm>
           <a:prstGeom prst="line">
             <a:avLst/>
           </a:prstGeom>
-          <a:ln w="25400">
-            <a:solidFill>
-              <a:srgbClr val="8EDBD4"/>
-            </a:solidFill>
-            <a:headEnd type="none" w="med" len="med"/>
-            <a:tailEnd type="triangle" w="med" len="med"/>
-          </a:ln>
-          <a:effectLst/>
-        </p:spPr>
-      </p:cxnSp>
-      <p:sp>
-        <p:nvSpPr>
-          <p:cNvPr id="6" name="C4-E30 rect 4" descr="sci-ppt:o004"/>
-          <p:cNvSpPr/>
-          <p:nvPr/>
-        </p:nvSpPr>
-        <p:spPr>
-          <a:xfrm>
-            <a:off x="4480560" y="1417320"/>
-            <a:ext cx="3200400" cy="1325880"/>
-          </a:xfrm>
-          <a:prstGeom prst="rect">
-            <a:avLst/>
-          </a:prstGeom>
-          <a:solidFill>
-            <a:srgbClr val="213E4B"/>
-          </a:solidFill>
           <a:ln w="19050">
             <a:solidFill>
               <a:srgbClr val="B4C7D2"/>
@@ -3256,14 +3179,51 @@
           </a:ln>
           <a:effectLst/>
         </p:spPr>
-        <p:txBody>
-          <a:bodyPr rtlCol="0" anchor="ctr"/>
-          <a:lstStyle/>
-          <a:p>
-            <a:pPr algn="ctr"/>
-          </a:p>
-        </p:txBody>
-      </p:sp>
+      </p:cxnSp>
+      <p:cxnSp>
+        <p:nvCxnSpPr>
+          <p:cNvPr id="5" name="C4-E30 line 3" descr="sci-ppt:o003"/>
+          <p:cNvCxnSpPr/>
+          <p:nvPr/>
+        </p:nvCxnSpPr>
+        <p:spPr>
+          <a:xfrm>
+            <a:off x="914400" y="5029200"/>
+            <a:ext cx="0" cy="64008"/>
+          </a:xfrm>
+          <a:prstGeom prst="line">
+            <a:avLst/>
+          </a:prstGeom>
+          <a:ln w="12700">
+            <a:solidFill>
+              <a:srgbClr val="B4C7D2"/>
+            </a:solidFill>
+          </a:ln>
+          <a:effectLst/>
+        </p:spPr>
+      </p:cxnSp>
+      <p:cxnSp>
+        <p:nvCxnSpPr>
+          <p:cNvPr id="6" name="C4-E30 line 4" descr="sci-ppt:o004"/>
+          <p:cNvCxnSpPr/>
+          <p:nvPr/>
+        </p:nvCxnSpPr>
+        <p:spPr>
+          <a:xfrm>
+            <a:off x="914400" y="1371600"/>
+            <a:ext cx="0" cy="3657600"/>
+          </a:xfrm>
+          <a:prstGeom prst="line">
+            <a:avLst/>
+          </a:prstGeom>
+          <a:ln w="7620">
+            <a:solidFill>
+              <a:srgbClr val="2E4756"/>
+            </a:solidFill>
+          </a:ln>
+          <a:effectLst/>
+        </p:spPr>
+      </p:cxnSp>
       <p:sp>
         <p:nvSpPr>
           <p:cNvPr id="7" name="C4-E30 text 5" descr="sci-ppt:o005"/>
@@ -3272,8 +3232,8 @@
         </p:nvSpPr>
         <p:spPr>
           <a:xfrm>
-            <a:off x="4645152" y="1627632"/>
-            <a:ext cx="2871216" cy="914400"/>
+            <a:off x="457200" y="5111496"/>
+            <a:ext cx="914400" cy="208407"/>
           </a:xfrm>
           <a:prstGeom prst="rect">
             <a:avLst/>
@@ -3282,84 +3242,72 @@
           <a:effectLst/>
         </p:spPr>
         <p:txBody>
-          <a:bodyPr wrap="square" lIns="27432" rIns="27432" tIns="18288" bIns="18288" anchor="ctr">
+          <a:bodyPr wrap="none" lIns="18288" rIns="18288" tIns="18288" bIns="18288" anchor="t">
             <a:spAutoFit/>
           </a:bodyPr>
           <a:lstStyle/>
           <a:p>
-            <a:pPr algn="l">
+            <a:pPr algn="ctr">
               <a:spcAft>
                 <a:spcPts val="0"/>
               </a:spcAft>
             </a:pPr>
             <a:r>
-              <a:rPr sz="1800" b="0" i="0">
+              <a:rPr sz="1050" b="0" i="0">
                 <a:solidFill>
-                  <a:srgbClr val="E7F0F3"/>
+                  <a:srgbClr val="B4C7D2"/>
                 </a:solidFill>
                 <a:latin typeface="Arial"/>
               </a:rPr>
-              <a:t>Transmitted E_solid, I_net</a:t>
+              <a:t>0.0</a:t>
             </a:r>
           </a:p>
         </p:txBody>
       </p:sp>
       <p:cxnSp>
         <p:nvCxnSpPr>
-          <p:cNvPr id="8" name="C4-E30 arrow 6" descr="sci-ppt:o006"/>
+          <p:cNvPr id="8" name="C4-E30 line 6" descr="sci-ppt:o006"/>
           <p:cNvCxnSpPr/>
           <p:nvPr/>
         </p:nvCxnSpPr>
         <p:spPr>
           <a:xfrm>
-            <a:off x="7680960" y="2057400"/>
-            <a:ext cx="640080" cy="0"/>
+            <a:off x="2084832" y="5029200"/>
+            <a:ext cx="0" cy="64008"/>
           </a:xfrm>
           <a:prstGeom prst="line">
             <a:avLst/>
           </a:prstGeom>
-          <a:ln w="25400">
-            <a:solidFill>
-              <a:srgbClr val="8EDBD4"/>
-            </a:solidFill>
-            <a:headEnd type="none" w="med" len="med"/>
-            <a:tailEnd type="triangle" w="med" len="med"/>
-          </a:ln>
-          <a:effectLst/>
-        </p:spPr>
-      </p:cxnSp>
-      <p:sp>
-        <p:nvSpPr>
-          <p:cNvPr id="9" name="C4-E30 rect 7" descr="sci-ppt:o007"/>
-          <p:cNvSpPr/>
-          <p:nvPr/>
-        </p:nvSpPr>
-        <p:spPr>
-          <a:xfrm>
-            <a:off x="8366760" y="1417320"/>
-            <a:ext cx="3200400" cy="1325880"/>
-          </a:xfrm>
-          <a:prstGeom prst="rect">
-            <a:avLst/>
-          </a:prstGeom>
-          <a:solidFill>
-            <a:srgbClr val="213E4B"/>
-          </a:solidFill>
-          <a:ln w="19050">
+          <a:ln w="12700">
             <a:solidFill>
               <a:srgbClr val="B4C7D2"/>
             </a:solidFill>
           </a:ln>
           <a:effectLst/>
         </p:spPr>
-        <p:txBody>
-          <a:bodyPr rtlCol="0" anchor="ctr"/>
-          <a:lstStyle/>
-          <a:p>
-            <a:pPr algn="ctr"/>
-          </a:p>
-        </p:txBody>
-      </p:sp>
+      </p:cxnSp>
+      <p:cxnSp>
+        <p:nvCxnSpPr>
+          <p:cNvPr id="9" name="C4-E30 line 7" descr="sci-ppt:o007"/>
+          <p:cNvCxnSpPr/>
+          <p:nvPr/>
+        </p:nvCxnSpPr>
+        <p:spPr>
+          <a:xfrm>
+            <a:off x="2084832" y="1371600"/>
+            <a:ext cx="0" cy="3657600"/>
+          </a:xfrm>
+          <a:prstGeom prst="line">
+            <a:avLst/>
+          </a:prstGeom>
+          <a:ln w="7620">
+            <a:solidFill>
+              <a:srgbClr val="2E4756"/>
+            </a:solidFill>
+          </a:ln>
+          <a:effectLst/>
+        </p:spPr>
+      </p:cxnSp>
       <p:sp>
         <p:nvSpPr>
           <p:cNvPr id="10" name="C4-E30 text 8" descr="sci-ppt:o008"/>
@@ -3368,8 +3316,8 @@
         </p:nvSpPr>
         <p:spPr>
           <a:xfrm>
-            <a:off x="8531352" y="1627632"/>
-            <a:ext cx="2871216" cy="914400"/>
+            <a:off x="1627632" y="5111496"/>
+            <a:ext cx="914400" cy="208407"/>
           </a:xfrm>
           <a:prstGeom prst="rect">
             <a:avLst/>
@@ -3378,68 +3326,50 @@
           <a:effectLst/>
         </p:spPr>
         <p:txBody>
-          <a:bodyPr wrap="square" lIns="27432" rIns="27432" tIns="18288" bIns="18288" anchor="ctr">
+          <a:bodyPr wrap="none" lIns="18288" rIns="18288" tIns="18288" bIns="18288" anchor="t">
             <a:spAutoFit/>
           </a:bodyPr>
           <a:lstStyle/>
           <a:p>
-            <a:pPr algn="l">
+            <a:pPr algn="ctr">
               <a:spcAft>
                 <a:spcPts val="0"/>
               </a:spcAft>
             </a:pPr>
             <a:r>
-              <a:rPr sz="1800" b="0" i="0">
+              <a:rPr sz="1050" b="0" i="0">
                 <a:solidFill>
-                  <a:srgbClr val="E7F0F3"/>
+                  <a:srgbClr val="B4C7D2"/>
                 </a:solidFill>
                 <a:latin typeface="Arial"/>
               </a:rPr>
-              <a:t>Release + departure cost</a:t>
-            </a:r>
-          </a:p>
-        </p:txBody>
-      </p:sp>
-      <p:sp>
-        <p:nvSpPr>
-          <p:cNvPr id="11" name="C4-E30 text 9" descr="sci-ppt:o009"/>
-          <p:cNvSpPr txBox="1"/>
+              <a:t>0.5</a:t>
+            </a:r>
+          </a:p>
+        </p:txBody>
+      </p:sp>
+      <p:cxnSp>
+        <p:nvCxnSpPr>
+          <p:cNvPr id="11" name="C4-E30 line 9" descr="sci-ppt:o009"/>
+          <p:cNvCxnSpPr/>
           <p:nvPr/>
-        </p:nvSpPr>
-        <p:spPr>
-          <a:xfrm>
-            <a:off x="731520" y="3246120"/>
-            <a:ext cx="10789920" cy="457200"/>
-          </a:xfrm>
-          <a:prstGeom prst="rect">
+        </p:nvCxnSpPr>
+        <p:spPr>
+          <a:xfrm>
+            <a:off x="3255264" y="5029200"/>
+            <a:ext cx="0" cy="64008"/>
+          </a:xfrm>
+          <a:prstGeom prst="line">
             <a:avLst/>
           </a:prstGeom>
-          <a:noFill/>
+          <a:ln w="12700">
+            <a:solidFill>
+              <a:srgbClr val="B4C7D2"/>
+            </a:solidFill>
+          </a:ln>
           <a:effectLst/>
         </p:spPr>
-        <p:txBody>
-          <a:bodyPr wrap="square" lIns="27432" rIns="27432" tIns="18288" bIns="18288" anchor="ctr">
-            <a:spAutoFit/>
-          </a:bodyPr>
-          <a:lstStyle/>
-          <a:p>
-            <a:pPr algn="l">
-              <a:spcAft>
-                <a:spcPts val="0"/>
-              </a:spcAft>
-            </a:pPr>
-            <a:r>
-              <a:rPr sz="1800" b="0" i="0">
-                <a:solidFill>
-                  <a:srgbClr val="8EDBD4"/>
-                </a:solidFill>
-                <a:latin typeface="Arial"/>
-              </a:rPr>
-              <a:t>Work, storage, fracture consumption and net impulse retain separate meanings.</a:t>
-            </a:r>
-          </a:p>
-        </p:txBody>
-      </p:sp>
+      </p:cxnSp>
       <p:cxnSp>
         <p:nvCxnSpPr>
           <p:cNvPr id="12" name="C4-E30 line 10" descr="sci-ppt:o010"/>
@@ -3448,30 +3378,114 @@
         </p:nvCxnSpPr>
         <p:spPr>
           <a:xfrm>
-            <a:off x="274320" y="3977639"/>
-            <a:ext cx="11612880" cy="0"/>
+            <a:off x="3255264" y="1371600"/>
+            <a:ext cx="0" cy="3657600"/>
+          </a:xfrm>
+          <a:prstGeom prst="line">
+            <a:avLst/>
+          </a:prstGeom>
+          <a:ln w="7620">
+            <a:solidFill>
+              <a:srgbClr val="2E4756"/>
+            </a:solidFill>
+          </a:ln>
+          <a:effectLst/>
+        </p:spPr>
+      </p:cxnSp>
+      <p:sp>
+        <p:nvSpPr>
+          <p:cNvPr id="13" name="C4-E30 text 11" descr="sci-ppt:o011"/>
+          <p:cNvSpPr txBox="1"/>
+          <p:nvPr/>
+        </p:nvSpPr>
+        <p:spPr>
+          <a:xfrm>
+            <a:off x="2798064" y="5111496"/>
+            <a:ext cx="914400" cy="208407"/>
+          </a:xfrm>
+          <a:prstGeom prst="rect">
+            <a:avLst/>
+          </a:prstGeom>
+          <a:noFill/>
+          <a:effectLst/>
+        </p:spPr>
+        <p:txBody>
+          <a:bodyPr wrap="none" lIns="18288" rIns="18288" tIns="18288" bIns="18288" anchor="t">
+            <a:spAutoFit/>
+          </a:bodyPr>
+          <a:lstStyle/>
+          <a:p>
+            <a:pPr algn="ctr">
+              <a:spcAft>
+                <a:spcPts val="0"/>
+              </a:spcAft>
+            </a:pPr>
+            <a:r>
+              <a:rPr sz="1050" b="0" i="0">
+                <a:solidFill>
+                  <a:srgbClr val="B4C7D2"/>
+                </a:solidFill>
+                <a:latin typeface="Arial"/>
+              </a:rPr>
+              <a:t>1.0</a:t>
+            </a:r>
+          </a:p>
+        </p:txBody>
+      </p:sp>
+      <p:cxnSp>
+        <p:nvCxnSpPr>
+          <p:cNvPr id="14" name="C4-E30 line 12" descr="sci-ppt:o012"/>
+          <p:cNvCxnSpPr/>
+          <p:nvPr/>
+        </p:nvCxnSpPr>
+        <p:spPr>
+          <a:xfrm>
+            <a:off x="4425696" y="5029200"/>
+            <a:ext cx="0" cy="64008"/>
           </a:xfrm>
           <a:prstGeom prst="line">
             <a:avLst/>
           </a:prstGeom>
           <a:ln w="12700">
             <a:solidFill>
-              <a:srgbClr val="405967"/>
+              <a:srgbClr val="B4C7D2"/>
             </a:solidFill>
           </a:ln>
           <a:effectLst/>
         </p:spPr>
       </p:cxnSp>
-      <p:sp>
-        <p:nvSpPr>
-          <p:cNvPr id="13" name="C4-E30 text 11" descr="sci-ppt:o011"/>
+      <p:cxnSp>
+        <p:nvCxnSpPr>
+          <p:cNvPr id="15" name="C4-E30 line 13" descr="sci-ppt:o013"/>
+          <p:cNvCxnSpPr/>
+          <p:nvPr/>
+        </p:nvCxnSpPr>
+        <p:spPr>
+          <a:xfrm>
+            <a:off x="4425696" y="1371600"/>
+            <a:ext cx="0" cy="3657600"/>
+          </a:xfrm>
+          <a:prstGeom prst="line">
+            <a:avLst/>
+          </a:prstGeom>
+          <a:ln w="7620">
+            <a:solidFill>
+              <a:srgbClr val="2E4756"/>
+            </a:solidFill>
+          </a:ln>
+          <a:effectLst/>
+        </p:spPr>
+      </p:cxnSp>
+      <p:sp>
+        <p:nvSpPr>
+          <p:cNvPr id="16" name="C4-E30 text 14" descr="sci-ppt:o014"/>
           <p:cNvSpPr txBox="1"/>
           <p:nvPr/>
         </p:nvSpPr>
         <p:spPr>
           <a:xfrm>
-            <a:off x="320040" y="4096512"/>
-            <a:ext cx="5715000" cy="246888"/>
+            <a:off x="3968496" y="5111496"/>
+            <a:ext cx="914400" cy="208407"/>
           </a:xfrm>
           <a:prstGeom prst="rect">
             <a:avLst/>
@@ -3480,7 +3494,529 @@
           <a:effectLst/>
         </p:spPr>
         <p:txBody>
-          <a:bodyPr wrap="square" lIns="27432" rIns="27432" tIns="18288" bIns="18288" anchor="ctr">
+          <a:bodyPr wrap="none" lIns="18288" rIns="18288" tIns="18288" bIns="18288" anchor="t">
+            <a:spAutoFit/>
+          </a:bodyPr>
+          <a:lstStyle/>
+          <a:p>
+            <a:pPr algn="ctr">
+              <a:spcAft>
+                <a:spcPts val="0"/>
+              </a:spcAft>
+            </a:pPr>
+            <a:r>
+              <a:rPr sz="1050" b="0" i="0">
+                <a:solidFill>
+                  <a:srgbClr val="B4C7D2"/>
+                </a:solidFill>
+                <a:latin typeface="Arial"/>
+              </a:rPr>
+              <a:t>1.5</a:t>
+            </a:r>
+          </a:p>
+        </p:txBody>
+      </p:sp>
+      <p:cxnSp>
+        <p:nvCxnSpPr>
+          <p:cNvPr id="17" name="C4-E30 line 15" descr="sci-ppt:o015"/>
+          <p:cNvCxnSpPr/>
+          <p:nvPr/>
+        </p:nvCxnSpPr>
+        <p:spPr>
+          <a:xfrm>
+            <a:off x="5596128" y="5029200"/>
+            <a:ext cx="0" cy="64008"/>
+          </a:xfrm>
+          <a:prstGeom prst="line">
+            <a:avLst/>
+          </a:prstGeom>
+          <a:ln w="12700">
+            <a:solidFill>
+              <a:srgbClr val="B4C7D2"/>
+            </a:solidFill>
+          </a:ln>
+          <a:effectLst/>
+        </p:spPr>
+      </p:cxnSp>
+      <p:cxnSp>
+        <p:nvCxnSpPr>
+          <p:cNvPr id="18" name="C4-E30 line 16" descr="sci-ppt:o016"/>
+          <p:cNvCxnSpPr/>
+          <p:nvPr/>
+        </p:nvCxnSpPr>
+        <p:spPr>
+          <a:xfrm>
+            <a:off x="5596128" y="1371600"/>
+            <a:ext cx="0" cy="3657600"/>
+          </a:xfrm>
+          <a:prstGeom prst="line">
+            <a:avLst/>
+          </a:prstGeom>
+          <a:ln w="7620">
+            <a:solidFill>
+              <a:srgbClr val="2E4756"/>
+            </a:solidFill>
+          </a:ln>
+          <a:effectLst/>
+        </p:spPr>
+      </p:cxnSp>
+      <p:sp>
+        <p:nvSpPr>
+          <p:cNvPr id="19" name="C4-E30 text 17" descr="sci-ppt:o017"/>
+          <p:cNvSpPr txBox="1"/>
+          <p:nvPr/>
+        </p:nvSpPr>
+        <p:spPr>
+          <a:xfrm>
+            <a:off x="5138928" y="5111496"/>
+            <a:ext cx="914400" cy="208407"/>
+          </a:xfrm>
+          <a:prstGeom prst="rect">
+            <a:avLst/>
+          </a:prstGeom>
+          <a:noFill/>
+          <a:effectLst/>
+        </p:spPr>
+        <p:txBody>
+          <a:bodyPr wrap="none" lIns="18288" rIns="18288" tIns="18288" bIns="18288" anchor="t">
+            <a:spAutoFit/>
+          </a:bodyPr>
+          <a:lstStyle/>
+          <a:p>
+            <a:pPr algn="ctr">
+              <a:spcAft>
+                <a:spcPts val="0"/>
+              </a:spcAft>
+            </a:pPr>
+            <a:r>
+              <a:rPr sz="1050" b="0" i="0">
+                <a:solidFill>
+                  <a:srgbClr val="B4C7D2"/>
+                </a:solidFill>
+                <a:latin typeface="Arial"/>
+              </a:rPr>
+              <a:t>2.0</a:t>
+            </a:r>
+          </a:p>
+        </p:txBody>
+      </p:sp>
+      <p:cxnSp>
+        <p:nvCxnSpPr>
+          <p:cNvPr id="20" name="C4-E30 line 18" descr="sci-ppt:o018"/>
+          <p:cNvCxnSpPr/>
+          <p:nvPr/>
+        </p:nvCxnSpPr>
+        <p:spPr>
+          <a:xfrm>
+            <a:off x="6766560" y="5029200"/>
+            <a:ext cx="0" cy="64008"/>
+          </a:xfrm>
+          <a:prstGeom prst="line">
+            <a:avLst/>
+          </a:prstGeom>
+          <a:ln w="12700">
+            <a:solidFill>
+              <a:srgbClr val="B4C7D2"/>
+            </a:solidFill>
+          </a:ln>
+          <a:effectLst/>
+        </p:spPr>
+      </p:cxnSp>
+      <p:cxnSp>
+        <p:nvCxnSpPr>
+          <p:cNvPr id="21" name="C4-E30 line 19" descr="sci-ppt:o019"/>
+          <p:cNvCxnSpPr/>
+          <p:nvPr/>
+        </p:nvCxnSpPr>
+        <p:spPr>
+          <a:xfrm>
+            <a:off x="6766560" y="1371600"/>
+            <a:ext cx="0" cy="3657600"/>
+          </a:xfrm>
+          <a:prstGeom prst="line">
+            <a:avLst/>
+          </a:prstGeom>
+          <a:ln w="7620">
+            <a:solidFill>
+              <a:srgbClr val="2E4756"/>
+            </a:solidFill>
+          </a:ln>
+          <a:effectLst/>
+        </p:spPr>
+      </p:cxnSp>
+      <p:sp>
+        <p:nvSpPr>
+          <p:cNvPr id="22" name="C4-E30 text 20" descr="sci-ppt:o020"/>
+          <p:cNvSpPr txBox="1"/>
+          <p:nvPr/>
+        </p:nvSpPr>
+        <p:spPr>
+          <a:xfrm>
+            <a:off x="6309360" y="5111496"/>
+            <a:ext cx="914400" cy="208407"/>
+          </a:xfrm>
+          <a:prstGeom prst="rect">
+            <a:avLst/>
+          </a:prstGeom>
+          <a:noFill/>
+          <a:effectLst/>
+        </p:spPr>
+        <p:txBody>
+          <a:bodyPr wrap="none" lIns="18288" rIns="18288" tIns="18288" bIns="18288" anchor="t">
+            <a:spAutoFit/>
+          </a:bodyPr>
+          <a:lstStyle/>
+          <a:p>
+            <a:pPr algn="ctr">
+              <a:spcAft>
+                <a:spcPts val="0"/>
+              </a:spcAft>
+            </a:pPr>
+            <a:r>
+              <a:rPr sz="1050" b="0" i="0">
+                <a:solidFill>
+                  <a:srgbClr val="B4C7D2"/>
+                </a:solidFill>
+                <a:latin typeface="Arial"/>
+              </a:rPr>
+              <a:t>2.5</a:t>
+            </a:r>
+          </a:p>
+        </p:txBody>
+      </p:sp>
+      <p:cxnSp>
+        <p:nvCxnSpPr>
+          <p:cNvPr id="23" name="C4-E30 line 21" descr="sci-ppt:o021"/>
+          <p:cNvCxnSpPr/>
+          <p:nvPr/>
+        </p:nvCxnSpPr>
+        <p:spPr>
+          <a:xfrm>
+            <a:off x="850392" y="5029200"/>
+            <a:ext cx="64008" cy="0"/>
+          </a:xfrm>
+          <a:prstGeom prst="line">
+            <a:avLst/>
+          </a:prstGeom>
+          <a:ln w="12700">
+            <a:solidFill>
+              <a:srgbClr val="B4C7D2"/>
+            </a:solidFill>
+          </a:ln>
+          <a:effectLst/>
+        </p:spPr>
+      </p:cxnSp>
+      <p:cxnSp>
+        <p:nvCxnSpPr>
+          <p:cNvPr id="24" name="C4-E30 line 22" descr="sci-ppt:o022"/>
+          <p:cNvCxnSpPr/>
+          <p:nvPr/>
+        </p:nvCxnSpPr>
+        <p:spPr>
+          <a:xfrm>
+            <a:off x="850392" y="3810000"/>
+            <a:ext cx="64008" cy="0"/>
+          </a:xfrm>
+          <a:prstGeom prst="line">
+            <a:avLst/>
+          </a:prstGeom>
+          <a:ln w="12700">
+            <a:solidFill>
+              <a:srgbClr val="B4C7D2"/>
+            </a:solidFill>
+          </a:ln>
+          <a:effectLst/>
+        </p:spPr>
+      </p:cxnSp>
+      <p:cxnSp>
+        <p:nvCxnSpPr>
+          <p:cNvPr id="25" name="C4-E30 line 23" descr="sci-ppt:o023"/>
+          <p:cNvCxnSpPr/>
+          <p:nvPr/>
+        </p:nvCxnSpPr>
+        <p:spPr>
+          <a:xfrm>
+            <a:off x="914400" y="3810000"/>
+            <a:ext cx="5852160" cy="0"/>
+          </a:xfrm>
+          <a:prstGeom prst="line">
+            <a:avLst/>
+          </a:prstGeom>
+          <a:ln w="7620">
+            <a:solidFill>
+              <a:srgbClr val="2E4756"/>
+            </a:solidFill>
+          </a:ln>
+          <a:effectLst/>
+        </p:spPr>
+      </p:cxnSp>
+      <p:sp>
+        <p:nvSpPr>
+          <p:cNvPr id="26" name="C4-E30 text 24" descr="sci-ppt:o024"/>
+          <p:cNvSpPr txBox="1"/>
+          <p:nvPr/>
+        </p:nvSpPr>
+        <p:spPr>
+          <a:xfrm>
+            <a:off x="45720" y="3727704"/>
+            <a:ext cx="777240" cy="208407"/>
+          </a:xfrm>
+          <a:prstGeom prst="rect">
+            <a:avLst/>
+          </a:prstGeom>
+          <a:noFill/>
+          <a:effectLst/>
+        </p:spPr>
+        <p:txBody>
+          <a:bodyPr wrap="none" lIns="18288" rIns="18288" tIns="18288" bIns="18288" anchor="t">
+            <a:spAutoFit/>
+          </a:bodyPr>
+          <a:lstStyle/>
+          <a:p>
+            <a:pPr algn="r">
+              <a:spcAft>
+                <a:spcPts val="0"/>
+              </a:spcAft>
+            </a:pPr>
+            <a:r>
+              <a:rPr sz="1050" b="0" i="0">
+                <a:solidFill>
+                  <a:srgbClr val="B4C7D2"/>
+                </a:solidFill>
+                <a:latin typeface="Arial"/>
+              </a:rPr>
+              <a:t>10</a:t>
+            </a:r>
+          </a:p>
+        </p:txBody>
+      </p:sp>
+      <p:cxnSp>
+        <p:nvCxnSpPr>
+          <p:cNvPr id="27" name="C4-E30 line 25" descr="sci-ppt:o025"/>
+          <p:cNvCxnSpPr/>
+          <p:nvPr/>
+        </p:nvCxnSpPr>
+        <p:spPr>
+          <a:xfrm>
+            <a:off x="850392" y="2590800"/>
+            <a:ext cx="64008" cy="0"/>
+          </a:xfrm>
+          <a:prstGeom prst="line">
+            <a:avLst/>
+          </a:prstGeom>
+          <a:ln w="12700">
+            <a:solidFill>
+              <a:srgbClr val="B4C7D2"/>
+            </a:solidFill>
+          </a:ln>
+          <a:effectLst/>
+        </p:spPr>
+      </p:cxnSp>
+      <p:cxnSp>
+        <p:nvCxnSpPr>
+          <p:cNvPr id="28" name="C4-E30 line 26" descr="sci-ppt:o026"/>
+          <p:cNvCxnSpPr/>
+          <p:nvPr/>
+        </p:nvCxnSpPr>
+        <p:spPr>
+          <a:xfrm>
+            <a:off x="914400" y="2590800"/>
+            <a:ext cx="5852160" cy="0"/>
+          </a:xfrm>
+          <a:prstGeom prst="line">
+            <a:avLst/>
+          </a:prstGeom>
+          <a:ln w="7620">
+            <a:solidFill>
+              <a:srgbClr val="2E4756"/>
+            </a:solidFill>
+          </a:ln>
+          <a:effectLst/>
+        </p:spPr>
+      </p:cxnSp>
+      <p:sp>
+        <p:nvSpPr>
+          <p:cNvPr id="29" name="C4-E30 text 27" descr="sci-ppt:o027"/>
+          <p:cNvSpPr txBox="1"/>
+          <p:nvPr/>
+        </p:nvSpPr>
+        <p:spPr>
+          <a:xfrm>
+            <a:off x="45720" y="2508504"/>
+            <a:ext cx="777240" cy="208407"/>
+          </a:xfrm>
+          <a:prstGeom prst="rect">
+            <a:avLst/>
+          </a:prstGeom>
+          <a:noFill/>
+          <a:effectLst/>
+        </p:spPr>
+        <p:txBody>
+          <a:bodyPr wrap="none" lIns="18288" rIns="18288" tIns="18288" bIns="18288" anchor="t">
+            <a:spAutoFit/>
+          </a:bodyPr>
+          <a:lstStyle/>
+          <a:p>
+            <a:pPr algn="r">
+              <a:spcAft>
+                <a:spcPts val="0"/>
+              </a:spcAft>
+            </a:pPr>
+            <a:r>
+              <a:rPr sz="1050" b="0" i="0">
+                <a:solidFill>
+                  <a:srgbClr val="B4C7D2"/>
+                </a:solidFill>
+                <a:latin typeface="Arial"/>
+              </a:rPr>
+              <a:t>20</a:t>
+            </a:r>
+          </a:p>
+        </p:txBody>
+      </p:sp>
+      <p:cxnSp>
+        <p:nvCxnSpPr>
+          <p:cNvPr id="30" name="C4-E30 line 28" descr="sci-ppt:o028"/>
+          <p:cNvCxnSpPr/>
+          <p:nvPr/>
+        </p:nvCxnSpPr>
+        <p:spPr>
+          <a:xfrm>
+            <a:off x="850392" y="1371600"/>
+            <a:ext cx="64008" cy="0"/>
+          </a:xfrm>
+          <a:prstGeom prst="line">
+            <a:avLst/>
+          </a:prstGeom>
+          <a:ln w="12700">
+            <a:solidFill>
+              <a:srgbClr val="B4C7D2"/>
+            </a:solidFill>
+          </a:ln>
+          <a:effectLst/>
+        </p:spPr>
+      </p:cxnSp>
+      <p:cxnSp>
+        <p:nvCxnSpPr>
+          <p:cNvPr id="31" name="C4-E30 line 29" descr="sci-ppt:o029"/>
+          <p:cNvCxnSpPr/>
+          <p:nvPr/>
+        </p:nvCxnSpPr>
+        <p:spPr>
+          <a:xfrm>
+            <a:off x="914400" y="1371600"/>
+            <a:ext cx="5852160" cy="0"/>
+          </a:xfrm>
+          <a:prstGeom prst="line">
+            <a:avLst/>
+          </a:prstGeom>
+          <a:ln w="7620">
+            <a:solidFill>
+              <a:srgbClr val="2E4756"/>
+            </a:solidFill>
+          </a:ln>
+          <a:effectLst/>
+        </p:spPr>
+      </p:cxnSp>
+      <p:sp>
+        <p:nvSpPr>
+          <p:cNvPr id="32" name="C4-E30 text 30" descr="sci-ppt:o030"/>
+          <p:cNvSpPr txBox="1"/>
+          <p:nvPr/>
+        </p:nvSpPr>
+        <p:spPr>
+          <a:xfrm>
+            <a:off x="45720" y="1289304"/>
+            <a:ext cx="777240" cy="208407"/>
+          </a:xfrm>
+          <a:prstGeom prst="rect">
+            <a:avLst/>
+          </a:prstGeom>
+          <a:noFill/>
+          <a:effectLst/>
+        </p:spPr>
+        <p:txBody>
+          <a:bodyPr wrap="none" lIns="18288" rIns="18288" tIns="18288" bIns="18288" anchor="t">
+            <a:spAutoFit/>
+          </a:bodyPr>
+          <a:lstStyle/>
+          <a:p>
+            <a:pPr algn="r">
+              <a:spcAft>
+                <a:spcPts val="0"/>
+              </a:spcAft>
+            </a:pPr>
+            <a:r>
+              <a:rPr sz="1050" b="0" i="0">
+                <a:solidFill>
+                  <a:srgbClr val="B4C7D2"/>
+                </a:solidFill>
+                <a:latin typeface="Arial"/>
+              </a:rPr>
+              <a:t>30</a:t>
+            </a:r>
+          </a:p>
+        </p:txBody>
+      </p:sp>
+      <p:sp>
+        <p:nvSpPr>
+          <p:cNvPr id="33" name="C4-E30 text 31" descr="sci-ppt:o031"/>
+          <p:cNvSpPr txBox="1"/>
+          <p:nvPr/>
+        </p:nvSpPr>
+        <p:spPr>
+          <a:xfrm>
+            <a:off x="914400" y="5312664"/>
+            <a:ext cx="5852160" cy="231648"/>
+          </a:xfrm>
+          <a:prstGeom prst="rect">
+            <a:avLst/>
+          </a:prstGeom>
+          <a:noFill/>
+          <a:effectLst/>
+        </p:spPr>
+        <p:txBody>
+          <a:bodyPr wrap="none" lIns="18288" rIns="18288" tIns="18288" bIns="18288" anchor="t">
+            <a:spAutoFit/>
+          </a:bodyPr>
+          <a:lstStyle/>
+          <a:p>
+            <a:pPr algn="ctr">
+              <a:spcAft>
+                <a:spcPts val="0"/>
+              </a:spcAft>
+            </a:pPr>
+            <a:r>
+              <a:rPr sz="1200" b="0" i="0">
+                <a:solidFill>
+                  <a:srgbClr val="E7F0F3"/>
+                </a:solidFill>
+                <a:latin typeface="Arial"/>
+              </a:rPr>
+              <a:t>film departure speed v_f  (m/s)</a:t>
+            </a:r>
+          </a:p>
+        </p:txBody>
+      </p:sp>
+      <p:sp>
+        <p:nvSpPr>
+          <p:cNvPr id="34" name="C4-E30 text 32" descr="sci-ppt:o032"/>
+          <p:cNvSpPr txBox="1"/>
+          <p:nvPr/>
+        </p:nvSpPr>
+        <p:spPr>
+          <a:xfrm>
+            <a:off x="365760" y="1024128"/>
+            <a:ext cx="5852160" cy="231648"/>
+          </a:xfrm>
+          <a:prstGeom prst="rect">
+            <a:avLst/>
+          </a:prstGeom>
+          <a:noFill/>
+          <a:effectLst/>
+        </p:spPr>
+        <p:txBody>
+          <a:bodyPr wrap="none" lIns="18288" rIns="18288" tIns="18288" bIns="18288" anchor="t">
             <a:spAutoFit/>
           </a:bodyPr>
           <a:lstStyle/>
@@ -3491,27 +4027,1326 @@
               </a:spcAft>
             </a:pPr>
             <a:r>
-              <a:rPr sz="1150" b="0" i="0">
+              <a:rPr sz="1200" b="0" i="0">
                 <a:solidFill>
-                  <a:srgbClr val="B4C7D2"/>
+                  <a:srgbClr val="E7F0F3"/>
                 </a:solidFill>
                 <a:latin typeface="Arial"/>
               </a:rPr>
-              <a:t>• E_solid → available budget</a:t>
-            </a:r>
-          </a:p>
-        </p:txBody>
-      </p:sp>
-      <p:sp>
-        <p:nvSpPr>
-          <p:cNvPr id="14" name="C4-E30 text 12" descr="sci-ppt:o012"/>
+              <a:t>E_req  (nJ)</a:t>
+            </a:r>
+          </a:p>
+        </p:txBody>
+      </p:sp>
+      <p:sp>
+        <p:nvSpPr>
+          <p:cNvPr id="35" name="C4-E30 polygon 33" descr="sci-ppt:o033"/>
+          <p:cNvSpPr/>
+          <p:nvPr/>
+        </p:nvSpPr>
+        <p:spPr>
+          <a:xfrm>
+            <a:off x="914400" y="3531870"/>
+            <a:ext cx="5852160" cy="887730"/>
+          </a:xfrm>
+          <a:custGeom>
+            <a:avLst/>
+            <a:gdLst/>
+            <a:ahLst/>
+            <a:cxnLst/>
+            <a:rect l="l" t="t" r="r" b="b"/>
+            <a:pathLst>
+              <a:path w="5852160" h="887730">
+                <a:moveTo>
+                  <a:pt x="0" y="887730"/>
+                </a:moveTo>
+                <a:lnTo>
+                  <a:pt x="29407" y="887707"/>
+                </a:lnTo>
+                <a:lnTo>
+                  <a:pt x="58815" y="887640"/>
+                </a:lnTo>
+                <a:lnTo>
+                  <a:pt x="88223" y="887528"/>
+                </a:lnTo>
+                <a:lnTo>
+                  <a:pt x="117631" y="887371"/>
+                </a:lnTo>
+                <a:lnTo>
+                  <a:pt x="147039" y="887169"/>
+                </a:lnTo>
+                <a:lnTo>
+                  <a:pt x="176447" y="886922"/>
+                </a:lnTo>
+                <a:lnTo>
+                  <a:pt x="205854" y="886631"/>
+                </a:lnTo>
+                <a:lnTo>
+                  <a:pt x="235262" y="886295"/>
+                </a:lnTo>
+                <a:lnTo>
+                  <a:pt x="264670" y="885914"/>
+                </a:lnTo>
+                <a:lnTo>
+                  <a:pt x="294078" y="885488"/>
+                </a:lnTo>
+                <a:lnTo>
+                  <a:pt x="323486" y="885017"/>
+                </a:lnTo>
+                <a:lnTo>
+                  <a:pt x="352894" y="884501"/>
+                </a:lnTo>
+                <a:lnTo>
+                  <a:pt x="382301" y="883941"/>
+                </a:lnTo>
+                <a:lnTo>
+                  <a:pt x="411709" y="883336"/>
+                </a:lnTo>
+                <a:lnTo>
+                  <a:pt x="441117" y="882686"/>
+                </a:lnTo>
+                <a:lnTo>
+                  <a:pt x="470525" y="881991"/>
+                </a:lnTo>
+                <a:lnTo>
+                  <a:pt x="499933" y="881251"/>
+                </a:lnTo>
+                <a:lnTo>
+                  <a:pt x="529341" y="880466"/>
+                </a:lnTo>
+                <a:lnTo>
+                  <a:pt x="558748" y="879637"/>
+                </a:lnTo>
+                <a:lnTo>
+                  <a:pt x="588156" y="878763"/>
+                </a:lnTo>
+                <a:lnTo>
+                  <a:pt x="617564" y="877844"/>
+                </a:lnTo>
+                <a:lnTo>
+                  <a:pt x="646972" y="876880"/>
+                </a:lnTo>
+                <a:lnTo>
+                  <a:pt x="676380" y="875871"/>
+                </a:lnTo>
+                <a:lnTo>
+                  <a:pt x="705788" y="874817"/>
+                </a:lnTo>
+                <a:lnTo>
+                  <a:pt x="735195" y="873719"/>
+                </a:lnTo>
+                <a:lnTo>
+                  <a:pt x="764603" y="872576"/>
+                </a:lnTo>
+                <a:lnTo>
+                  <a:pt x="794011" y="871388"/>
+                </a:lnTo>
+                <a:lnTo>
+                  <a:pt x="823419" y="870155"/>
+                </a:lnTo>
+                <a:lnTo>
+                  <a:pt x="852827" y="868877"/>
+                </a:lnTo>
+                <a:lnTo>
+                  <a:pt x="882235" y="867554"/>
+                </a:lnTo>
+                <a:lnTo>
+                  <a:pt x="911643" y="866187"/>
+                </a:lnTo>
+                <a:lnTo>
+                  <a:pt x="941050" y="864775"/>
+                </a:lnTo>
+                <a:lnTo>
+                  <a:pt x="970458" y="863318"/>
+                </a:lnTo>
+                <a:lnTo>
+                  <a:pt x="999866" y="861816"/>
+                </a:lnTo>
+                <a:lnTo>
+                  <a:pt x="1029274" y="860269"/>
+                </a:lnTo>
+                <a:lnTo>
+                  <a:pt x="1058682" y="858677"/>
+                </a:lnTo>
+                <a:lnTo>
+                  <a:pt x="1088090" y="857041"/>
+                </a:lnTo>
+                <a:lnTo>
+                  <a:pt x="1117497" y="855360"/>
+                </a:lnTo>
+                <a:lnTo>
+                  <a:pt x="1146905" y="853633"/>
+                </a:lnTo>
+                <a:lnTo>
+                  <a:pt x="1176313" y="851863"/>
+                </a:lnTo>
+                <a:lnTo>
+                  <a:pt x="1205721" y="850047"/>
+                </a:lnTo>
+                <a:lnTo>
+                  <a:pt x="1235129" y="848186"/>
+                </a:lnTo>
+                <a:lnTo>
+                  <a:pt x="1264537" y="846281"/>
+                </a:lnTo>
+                <a:lnTo>
+                  <a:pt x="1293944" y="844330"/>
+                </a:lnTo>
+                <a:lnTo>
+                  <a:pt x="1323352" y="842335"/>
+                </a:lnTo>
+                <a:lnTo>
+                  <a:pt x="1352760" y="840295"/>
+                </a:lnTo>
+                <a:lnTo>
+                  <a:pt x="1382168" y="838211"/>
+                </a:lnTo>
+                <a:lnTo>
+                  <a:pt x="1411576" y="836081"/>
+                </a:lnTo>
+                <a:lnTo>
+                  <a:pt x="1440984" y="833907"/>
+                </a:lnTo>
+                <a:lnTo>
+                  <a:pt x="1470391" y="831687"/>
+                </a:lnTo>
+                <a:lnTo>
+                  <a:pt x="1499799" y="829423"/>
+                </a:lnTo>
+                <a:lnTo>
+                  <a:pt x="1529207" y="827114"/>
+                </a:lnTo>
+                <a:lnTo>
+                  <a:pt x="1558615" y="824761"/>
+                </a:lnTo>
+                <a:lnTo>
+                  <a:pt x="1588023" y="822362"/>
+                </a:lnTo>
+                <a:lnTo>
+                  <a:pt x="1617431" y="819919"/>
+                </a:lnTo>
+                <a:lnTo>
+                  <a:pt x="1646838" y="817430"/>
+                </a:lnTo>
+                <a:lnTo>
+                  <a:pt x="1676246" y="814897"/>
+                </a:lnTo>
+                <a:lnTo>
+                  <a:pt x="1705654" y="812319"/>
+                </a:lnTo>
+                <a:lnTo>
+                  <a:pt x="1735062" y="809696"/>
+                </a:lnTo>
+                <a:lnTo>
+                  <a:pt x="1764470" y="807029"/>
+                </a:lnTo>
+                <a:lnTo>
+                  <a:pt x="1793878" y="804316"/>
+                </a:lnTo>
+                <a:lnTo>
+                  <a:pt x="1823286" y="801559"/>
+                </a:lnTo>
+                <a:lnTo>
+                  <a:pt x="1852693" y="798757"/>
+                </a:lnTo>
+                <a:lnTo>
+                  <a:pt x="1882101" y="795910"/>
+                </a:lnTo>
+                <a:lnTo>
+                  <a:pt x="1911509" y="793018"/>
+                </a:lnTo>
+                <a:lnTo>
+                  <a:pt x="1940917" y="790082"/>
+                </a:lnTo>
+                <a:lnTo>
+                  <a:pt x="1970325" y="787100"/>
+                </a:lnTo>
+                <a:lnTo>
+                  <a:pt x="1999733" y="784074"/>
+                </a:lnTo>
+                <a:lnTo>
+                  <a:pt x="2029140" y="781003"/>
+                </a:lnTo>
+                <a:lnTo>
+                  <a:pt x="2058548" y="777887"/>
+                </a:lnTo>
+                <a:lnTo>
+                  <a:pt x="2087956" y="774726"/>
+                </a:lnTo>
+                <a:lnTo>
+                  <a:pt x="2117364" y="771521"/>
+                </a:lnTo>
+                <a:lnTo>
+                  <a:pt x="2146772" y="768270"/>
+                </a:lnTo>
+                <a:lnTo>
+                  <a:pt x="2176180" y="764975"/>
+                </a:lnTo>
+                <a:lnTo>
+                  <a:pt x="2205587" y="761635"/>
+                </a:lnTo>
+                <a:lnTo>
+                  <a:pt x="2234995" y="758250"/>
+                </a:lnTo>
+                <a:lnTo>
+                  <a:pt x="2264403" y="754820"/>
+                </a:lnTo>
+                <a:lnTo>
+                  <a:pt x="2293811" y="751345"/>
+                </a:lnTo>
+                <a:lnTo>
+                  <a:pt x="2323219" y="747826"/>
+                </a:lnTo>
+                <a:lnTo>
+                  <a:pt x="2352627" y="744262"/>
+                </a:lnTo>
+                <a:lnTo>
+                  <a:pt x="2382034" y="740652"/>
+                </a:lnTo>
+                <a:lnTo>
+                  <a:pt x="2411442" y="736999"/>
+                </a:lnTo>
+                <a:lnTo>
+                  <a:pt x="2440850" y="733300"/>
+                </a:lnTo>
+                <a:lnTo>
+                  <a:pt x="2470258" y="729556"/>
+                </a:lnTo>
+                <a:lnTo>
+                  <a:pt x="2499666" y="725768"/>
+                </a:lnTo>
+                <a:lnTo>
+                  <a:pt x="2529074" y="721934"/>
+                </a:lnTo>
+                <a:lnTo>
+                  <a:pt x="2558482" y="718056"/>
+                </a:lnTo>
+                <a:lnTo>
+                  <a:pt x="2587889" y="714133"/>
+                </a:lnTo>
+                <a:lnTo>
+                  <a:pt x="2617297" y="710166"/>
+                </a:lnTo>
+                <a:lnTo>
+                  <a:pt x="2646705" y="706153"/>
+                </a:lnTo>
+                <a:lnTo>
+                  <a:pt x="2676113" y="702095"/>
+                </a:lnTo>
+                <a:lnTo>
+                  <a:pt x="2705521" y="697993"/>
+                </a:lnTo>
+                <a:lnTo>
+                  <a:pt x="2734929" y="693846"/>
+                </a:lnTo>
+                <a:lnTo>
+                  <a:pt x="2764336" y="689654"/>
+                </a:lnTo>
+                <a:lnTo>
+                  <a:pt x="2793744" y="685417"/>
+                </a:lnTo>
+                <a:lnTo>
+                  <a:pt x="2823152" y="681136"/>
+                </a:lnTo>
+                <a:lnTo>
+                  <a:pt x="2852560" y="676809"/>
+                </a:lnTo>
+                <a:lnTo>
+                  <a:pt x="2881968" y="672438"/>
+                </a:lnTo>
+                <a:lnTo>
+                  <a:pt x="2911376" y="668022"/>
+                </a:lnTo>
+                <a:lnTo>
+                  <a:pt x="2940783" y="663561"/>
+                </a:lnTo>
+                <a:lnTo>
+                  <a:pt x="2970191" y="659055"/>
+                </a:lnTo>
+                <a:lnTo>
+                  <a:pt x="2999599" y="654505"/>
+                </a:lnTo>
+                <a:lnTo>
+                  <a:pt x="3029007" y="649909"/>
+                </a:lnTo>
+                <a:lnTo>
+                  <a:pt x="3058415" y="645269"/>
+                </a:lnTo>
+                <a:lnTo>
+                  <a:pt x="3087823" y="640584"/>
+                </a:lnTo>
+                <a:lnTo>
+                  <a:pt x="3117230" y="635854"/>
+                </a:lnTo>
+                <a:lnTo>
+                  <a:pt x="3146638" y="631079"/>
+                </a:lnTo>
+                <a:lnTo>
+                  <a:pt x="3176046" y="626259"/>
+                </a:lnTo>
+                <a:lnTo>
+                  <a:pt x="3205454" y="621395"/>
+                </a:lnTo>
+                <a:lnTo>
+                  <a:pt x="3234862" y="616486"/>
+                </a:lnTo>
+                <a:lnTo>
+                  <a:pt x="3264270" y="611531"/>
+                </a:lnTo>
+                <a:lnTo>
+                  <a:pt x="3293677" y="606532"/>
+                </a:lnTo>
+                <a:lnTo>
+                  <a:pt x="3323085" y="601489"/>
+                </a:lnTo>
+                <a:lnTo>
+                  <a:pt x="3352493" y="596400"/>
+                </a:lnTo>
+                <a:lnTo>
+                  <a:pt x="3381901" y="591267"/>
+                </a:lnTo>
+                <a:lnTo>
+                  <a:pt x="3411309" y="586088"/>
+                </a:lnTo>
+                <a:lnTo>
+                  <a:pt x="3440717" y="580865"/>
+                </a:lnTo>
+                <a:lnTo>
+                  <a:pt x="3470125" y="575597"/>
+                </a:lnTo>
+                <a:lnTo>
+                  <a:pt x="3499532" y="570284"/>
+                </a:lnTo>
+                <a:lnTo>
+                  <a:pt x="3528940" y="564927"/>
+                </a:lnTo>
+                <a:lnTo>
+                  <a:pt x="3558348" y="559524"/>
+                </a:lnTo>
+                <a:lnTo>
+                  <a:pt x="3587756" y="554077"/>
+                </a:lnTo>
+                <a:lnTo>
+                  <a:pt x="3617164" y="548585"/>
+                </a:lnTo>
+                <a:lnTo>
+                  <a:pt x="3646572" y="543048"/>
+                </a:lnTo>
+                <a:lnTo>
+                  <a:pt x="3675979" y="537466"/>
+                </a:lnTo>
+                <a:lnTo>
+                  <a:pt x="3705387" y="531839"/>
+                </a:lnTo>
+                <a:lnTo>
+                  <a:pt x="3734795" y="526168"/>
+                </a:lnTo>
+                <a:lnTo>
+                  <a:pt x="3764203" y="520452"/>
+                </a:lnTo>
+                <a:lnTo>
+                  <a:pt x="3793611" y="514691"/>
+                </a:lnTo>
+                <a:lnTo>
+                  <a:pt x="3823019" y="508885"/>
+                </a:lnTo>
+                <a:lnTo>
+                  <a:pt x="3852426" y="503034"/>
+                </a:lnTo>
+                <a:lnTo>
+                  <a:pt x="3881834" y="497138"/>
+                </a:lnTo>
+                <a:lnTo>
+                  <a:pt x="3911242" y="491198"/>
+                </a:lnTo>
+                <a:lnTo>
+                  <a:pt x="3940650" y="485212"/>
+                </a:lnTo>
+                <a:lnTo>
+                  <a:pt x="3970058" y="479182"/>
+                </a:lnTo>
+                <a:lnTo>
+                  <a:pt x="3999466" y="473107"/>
+                </a:lnTo>
+                <a:lnTo>
+                  <a:pt x="4028873" y="466987"/>
+                </a:lnTo>
+                <a:lnTo>
+                  <a:pt x="4058281" y="460823"/>
+                </a:lnTo>
+                <a:lnTo>
+                  <a:pt x="4087689" y="454613"/>
+                </a:lnTo>
+                <a:lnTo>
+                  <a:pt x="4117097" y="448359"/>
+                </a:lnTo>
+                <a:lnTo>
+                  <a:pt x="4146505" y="442060"/>
+                </a:lnTo>
+                <a:lnTo>
+                  <a:pt x="4175913" y="435716"/>
+                </a:lnTo>
+                <a:lnTo>
+                  <a:pt x="4205321" y="429327"/>
+                </a:lnTo>
+                <a:lnTo>
+                  <a:pt x="4234728" y="422894"/>
+                </a:lnTo>
+                <a:lnTo>
+                  <a:pt x="4264136" y="416415"/>
+                </a:lnTo>
+                <a:lnTo>
+                  <a:pt x="4293544" y="409892"/>
+                </a:lnTo>
+                <a:lnTo>
+                  <a:pt x="4322952" y="403324"/>
+                </a:lnTo>
+                <a:lnTo>
+                  <a:pt x="4352360" y="396711"/>
+                </a:lnTo>
+                <a:lnTo>
+                  <a:pt x="4381768" y="390053"/>
+                </a:lnTo>
+                <a:lnTo>
+                  <a:pt x="4411175" y="383350"/>
+                </a:lnTo>
+                <a:lnTo>
+                  <a:pt x="4440583" y="376603"/>
+                </a:lnTo>
+                <a:lnTo>
+                  <a:pt x="4469991" y="369810"/>
+                </a:lnTo>
+                <a:lnTo>
+                  <a:pt x="4499399" y="362973"/>
+                </a:lnTo>
+                <a:lnTo>
+                  <a:pt x="4528807" y="356091"/>
+                </a:lnTo>
+                <a:lnTo>
+                  <a:pt x="4558215" y="349164"/>
+                </a:lnTo>
+                <a:lnTo>
+                  <a:pt x="4587622" y="342193"/>
+                </a:lnTo>
+                <a:lnTo>
+                  <a:pt x="4617030" y="335176"/>
+                </a:lnTo>
+                <a:lnTo>
+                  <a:pt x="4646438" y="328115"/>
+                </a:lnTo>
+                <a:lnTo>
+                  <a:pt x="4675846" y="321009"/>
+                </a:lnTo>
+                <a:lnTo>
+                  <a:pt x="4705254" y="313858"/>
+                </a:lnTo>
+                <a:lnTo>
+                  <a:pt x="4734662" y="306662"/>
+                </a:lnTo>
+                <a:lnTo>
+                  <a:pt x="4764069" y="299421"/>
+                </a:lnTo>
+                <a:lnTo>
+                  <a:pt x="4793477" y="292136"/>
+                </a:lnTo>
+                <a:lnTo>
+                  <a:pt x="4822885" y="284806"/>
+                </a:lnTo>
+                <a:lnTo>
+                  <a:pt x="4852293" y="277431"/>
+                </a:lnTo>
+                <a:lnTo>
+                  <a:pt x="4881701" y="270011"/>
+                </a:lnTo>
+                <a:lnTo>
+                  <a:pt x="4911109" y="262546"/>
+                </a:lnTo>
+                <a:lnTo>
+                  <a:pt x="4940516" y="255036"/>
+                </a:lnTo>
+                <a:lnTo>
+                  <a:pt x="4969924" y="247482"/>
+                </a:lnTo>
+                <a:lnTo>
+                  <a:pt x="4999332" y="239882"/>
+                </a:lnTo>
+                <a:lnTo>
+                  <a:pt x="5028740" y="232238"/>
+                </a:lnTo>
+                <a:lnTo>
+                  <a:pt x="5058148" y="224549"/>
+                </a:lnTo>
+                <a:lnTo>
+                  <a:pt x="5087556" y="216815"/>
+                </a:lnTo>
+                <a:lnTo>
+                  <a:pt x="5116964" y="209037"/>
+                </a:lnTo>
+                <a:lnTo>
+                  <a:pt x="5146371" y="201213"/>
+                </a:lnTo>
+                <a:lnTo>
+                  <a:pt x="5175779" y="193345"/>
+                </a:lnTo>
+                <a:lnTo>
+                  <a:pt x="5205187" y="185432"/>
+                </a:lnTo>
+                <a:lnTo>
+                  <a:pt x="5234595" y="177474"/>
+                </a:lnTo>
+                <a:lnTo>
+                  <a:pt x="5264003" y="169471"/>
+                </a:lnTo>
+                <a:lnTo>
+                  <a:pt x="5293411" y="161423"/>
+                </a:lnTo>
+                <a:lnTo>
+                  <a:pt x="5322818" y="153331"/>
+                </a:lnTo>
+                <a:lnTo>
+                  <a:pt x="5352226" y="145193"/>
+                </a:lnTo>
+                <a:lnTo>
+                  <a:pt x="5381634" y="137011"/>
+                </a:lnTo>
+                <a:lnTo>
+                  <a:pt x="5411042" y="128784"/>
+                </a:lnTo>
+                <a:lnTo>
+                  <a:pt x="5440450" y="120513"/>
+                </a:lnTo>
+                <a:lnTo>
+                  <a:pt x="5469858" y="112196"/>
+                </a:lnTo>
+                <a:lnTo>
+                  <a:pt x="5499265" y="103834"/>
+                </a:lnTo>
+                <a:lnTo>
+                  <a:pt x="5528673" y="95428"/>
+                </a:lnTo>
+                <a:lnTo>
+                  <a:pt x="5558081" y="86977"/>
+                </a:lnTo>
+                <a:lnTo>
+                  <a:pt x="5587489" y="78481"/>
+                </a:lnTo>
+                <a:lnTo>
+                  <a:pt x="5616897" y="69940"/>
+                </a:lnTo>
+                <a:lnTo>
+                  <a:pt x="5646305" y="61354"/>
+                </a:lnTo>
+                <a:lnTo>
+                  <a:pt x="5675712" y="52724"/>
+                </a:lnTo>
+                <a:lnTo>
+                  <a:pt x="5705120" y="44049"/>
+                </a:lnTo>
+                <a:lnTo>
+                  <a:pt x="5734528" y="35328"/>
+                </a:lnTo>
+                <a:lnTo>
+                  <a:pt x="5763936" y="26563"/>
+                </a:lnTo>
+                <a:lnTo>
+                  <a:pt x="5793344" y="17754"/>
+                </a:lnTo>
+                <a:lnTo>
+                  <a:pt x="5822752" y="8899"/>
+                </a:lnTo>
+                <a:lnTo>
+                  <a:pt x="5852160" y="0"/>
+                </a:lnTo>
+              </a:path>
+            </a:pathLst>
+          </a:custGeom>
+          <a:noFill/>
+          <a:ln w="38100">
+            <a:solidFill>
+              <a:srgbClr val="8EDBD4"/>
+            </a:solidFill>
+          </a:ln>
+          <a:effectLst/>
+        </p:spPr>
+        <p:txBody>
+          <a:bodyPr rtlCol="0" anchor="ctr"/>
+          <a:lstStyle/>
+          <a:p>
+            <a:pPr algn="ctr"/>
+          </a:p>
+        </p:txBody>
+      </p:sp>
+      <p:sp>
+        <p:nvSpPr>
+          <p:cNvPr id="36" name="C4-E30 polygon 34" descr="sci-ppt:o034"/>
+          <p:cNvSpPr/>
+          <p:nvPr/>
+        </p:nvSpPr>
+        <p:spPr>
+          <a:xfrm>
+            <a:off x="914400" y="1703069"/>
+            <a:ext cx="5852160" cy="887731"/>
+          </a:xfrm>
+          <a:custGeom>
+            <a:avLst/>
+            <a:gdLst/>
+            <a:ahLst/>
+            <a:cxnLst/>
+            <a:rect l="l" t="t" r="r" b="b"/>
+            <a:pathLst>
+              <a:path w="5852160" h="887731">
+                <a:moveTo>
+                  <a:pt x="0" y="887731"/>
+                </a:moveTo>
+                <a:lnTo>
+                  <a:pt x="29407" y="887708"/>
+                </a:lnTo>
+                <a:lnTo>
+                  <a:pt x="58815" y="887641"/>
+                </a:lnTo>
+                <a:lnTo>
+                  <a:pt x="88223" y="887529"/>
+                </a:lnTo>
+                <a:lnTo>
+                  <a:pt x="117631" y="887372"/>
+                </a:lnTo>
+                <a:lnTo>
+                  <a:pt x="147039" y="887170"/>
+                </a:lnTo>
+                <a:lnTo>
+                  <a:pt x="176447" y="886923"/>
+                </a:lnTo>
+                <a:lnTo>
+                  <a:pt x="205854" y="886632"/>
+                </a:lnTo>
+                <a:lnTo>
+                  <a:pt x="235262" y="886296"/>
+                </a:lnTo>
+                <a:lnTo>
+                  <a:pt x="264670" y="885915"/>
+                </a:lnTo>
+                <a:lnTo>
+                  <a:pt x="294078" y="885489"/>
+                </a:lnTo>
+                <a:lnTo>
+                  <a:pt x="323486" y="885018"/>
+                </a:lnTo>
+                <a:lnTo>
+                  <a:pt x="352894" y="884502"/>
+                </a:lnTo>
+                <a:lnTo>
+                  <a:pt x="382301" y="883942"/>
+                </a:lnTo>
+                <a:lnTo>
+                  <a:pt x="411709" y="883337"/>
+                </a:lnTo>
+                <a:lnTo>
+                  <a:pt x="441117" y="882687"/>
+                </a:lnTo>
+                <a:lnTo>
+                  <a:pt x="470525" y="881992"/>
+                </a:lnTo>
+                <a:lnTo>
+                  <a:pt x="499933" y="881252"/>
+                </a:lnTo>
+                <a:lnTo>
+                  <a:pt x="529341" y="880467"/>
+                </a:lnTo>
+                <a:lnTo>
+                  <a:pt x="558748" y="879638"/>
+                </a:lnTo>
+                <a:lnTo>
+                  <a:pt x="588156" y="878764"/>
+                </a:lnTo>
+                <a:lnTo>
+                  <a:pt x="617564" y="877845"/>
+                </a:lnTo>
+                <a:lnTo>
+                  <a:pt x="646972" y="876881"/>
+                </a:lnTo>
+                <a:lnTo>
+                  <a:pt x="676380" y="875872"/>
+                </a:lnTo>
+                <a:lnTo>
+                  <a:pt x="705788" y="874818"/>
+                </a:lnTo>
+                <a:lnTo>
+                  <a:pt x="735195" y="873720"/>
+                </a:lnTo>
+                <a:lnTo>
+                  <a:pt x="764603" y="872577"/>
+                </a:lnTo>
+                <a:lnTo>
+                  <a:pt x="794011" y="871389"/>
+                </a:lnTo>
+                <a:lnTo>
+                  <a:pt x="823419" y="870156"/>
+                </a:lnTo>
+                <a:lnTo>
+                  <a:pt x="852827" y="868878"/>
+                </a:lnTo>
+                <a:lnTo>
+                  <a:pt x="882235" y="867555"/>
+                </a:lnTo>
+                <a:lnTo>
+                  <a:pt x="911643" y="866188"/>
+                </a:lnTo>
+                <a:lnTo>
+                  <a:pt x="941050" y="864776"/>
+                </a:lnTo>
+                <a:lnTo>
+                  <a:pt x="970458" y="863319"/>
+                </a:lnTo>
+                <a:lnTo>
+                  <a:pt x="999866" y="861817"/>
+                </a:lnTo>
+                <a:lnTo>
+                  <a:pt x="1029274" y="860270"/>
+                </a:lnTo>
+                <a:lnTo>
+                  <a:pt x="1058682" y="858678"/>
+                </a:lnTo>
+                <a:lnTo>
+                  <a:pt x="1088090" y="857042"/>
+                </a:lnTo>
+                <a:lnTo>
+                  <a:pt x="1117497" y="855361"/>
+                </a:lnTo>
+                <a:lnTo>
+                  <a:pt x="1146905" y="853634"/>
+                </a:lnTo>
+                <a:lnTo>
+                  <a:pt x="1176313" y="851864"/>
+                </a:lnTo>
+                <a:lnTo>
+                  <a:pt x="1205721" y="850048"/>
+                </a:lnTo>
+                <a:lnTo>
+                  <a:pt x="1235129" y="848187"/>
+                </a:lnTo>
+                <a:lnTo>
+                  <a:pt x="1264537" y="846282"/>
+                </a:lnTo>
+                <a:lnTo>
+                  <a:pt x="1293944" y="844331"/>
+                </a:lnTo>
+                <a:lnTo>
+                  <a:pt x="1323352" y="842336"/>
+                </a:lnTo>
+                <a:lnTo>
+                  <a:pt x="1352760" y="840296"/>
+                </a:lnTo>
+                <a:lnTo>
+                  <a:pt x="1382168" y="838212"/>
+                </a:lnTo>
+                <a:lnTo>
+                  <a:pt x="1411576" y="836082"/>
+                </a:lnTo>
+                <a:lnTo>
+                  <a:pt x="1440984" y="833908"/>
+                </a:lnTo>
+                <a:lnTo>
+                  <a:pt x="1470391" y="831688"/>
+                </a:lnTo>
+                <a:lnTo>
+                  <a:pt x="1499799" y="829424"/>
+                </a:lnTo>
+                <a:lnTo>
+                  <a:pt x="1529207" y="827115"/>
+                </a:lnTo>
+                <a:lnTo>
+                  <a:pt x="1558615" y="824762"/>
+                </a:lnTo>
+                <a:lnTo>
+                  <a:pt x="1588023" y="822363"/>
+                </a:lnTo>
+                <a:lnTo>
+                  <a:pt x="1617431" y="819920"/>
+                </a:lnTo>
+                <a:lnTo>
+                  <a:pt x="1646838" y="817431"/>
+                </a:lnTo>
+                <a:lnTo>
+                  <a:pt x="1676246" y="814898"/>
+                </a:lnTo>
+                <a:lnTo>
+                  <a:pt x="1705654" y="812320"/>
+                </a:lnTo>
+                <a:lnTo>
+                  <a:pt x="1735062" y="809697"/>
+                </a:lnTo>
+                <a:lnTo>
+                  <a:pt x="1764470" y="807030"/>
+                </a:lnTo>
+                <a:lnTo>
+                  <a:pt x="1793878" y="804317"/>
+                </a:lnTo>
+                <a:lnTo>
+                  <a:pt x="1823286" y="801560"/>
+                </a:lnTo>
+                <a:lnTo>
+                  <a:pt x="1852693" y="798758"/>
+                </a:lnTo>
+                <a:lnTo>
+                  <a:pt x="1882101" y="795911"/>
+                </a:lnTo>
+                <a:lnTo>
+                  <a:pt x="1911509" y="793019"/>
+                </a:lnTo>
+                <a:lnTo>
+                  <a:pt x="1940917" y="790083"/>
+                </a:lnTo>
+                <a:lnTo>
+                  <a:pt x="1970325" y="787101"/>
+                </a:lnTo>
+                <a:lnTo>
+                  <a:pt x="1999733" y="784075"/>
+                </a:lnTo>
+                <a:lnTo>
+                  <a:pt x="2029140" y="781004"/>
+                </a:lnTo>
+                <a:lnTo>
+                  <a:pt x="2058548" y="777888"/>
+                </a:lnTo>
+                <a:lnTo>
+                  <a:pt x="2087956" y="774727"/>
+                </a:lnTo>
+                <a:lnTo>
+                  <a:pt x="2117364" y="771522"/>
+                </a:lnTo>
+                <a:lnTo>
+                  <a:pt x="2146772" y="768271"/>
+                </a:lnTo>
+                <a:lnTo>
+                  <a:pt x="2176180" y="764976"/>
+                </a:lnTo>
+                <a:lnTo>
+                  <a:pt x="2205587" y="761636"/>
+                </a:lnTo>
+                <a:lnTo>
+                  <a:pt x="2234995" y="758251"/>
+                </a:lnTo>
+                <a:lnTo>
+                  <a:pt x="2264403" y="754821"/>
+                </a:lnTo>
+                <a:lnTo>
+                  <a:pt x="2293811" y="751346"/>
+                </a:lnTo>
+                <a:lnTo>
+                  <a:pt x="2323219" y="747827"/>
+                </a:lnTo>
+                <a:lnTo>
+                  <a:pt x="2352627" y="744263"/>
+                </a:lnTo>
+                <a:lnTo>
+                  <a:pt x="2382034" y="740653"/>
+                </a:lnTo>
+                <a:lnTo>
+                  <a:pt x="2411442" y="737000"/>
+                </a:lnTo>
+                <a:lnTo>
+                  <a:pt x="2440850" y="733301"/>
+                </a:lnTo>
+                <a:lnTo>
+                  <a:pt x="2470258" y="729557"/>
+                </a:lnTo>
+                <a:lnTo>
+                  <a:pt x="2499666" y="725769"/>
+                </a:lnTo>
+                <a:lnTo>
+                  <a:pt x="2529074" y="721935"/>
+                </a:lnTo>
+                <a:lnTo>
+                  <a:pt x="2558482" y="718057"/>
+                </a:lnTo>
+                <a:lnTo>
+                  <a:pt x="2587889" y="714134"/>
+                </a:lnTo>
+                <a:lnTo>
+                  <a:pt x="2617297" y="710167"/>
+                </a:lnTo>
+                <a:lnTo>
+                  <a:pt x="2646705" y="706154"/>
+                </a:lnTo>
+                <a:lnTo>
+                  <a:pt x="2676113" y="702096"/>
+                </a:lnTo>
+                <a:lnTo>
+                  <a:pt x="2705521" y="697994"/>
+                </a:lnTo>
+                <a:lnTo>
+                  <a:pt x="2734929" y="693847"/>
+                </a:lnTo>
+                <a:lnTo>
+                  <a:pt x="2764336" y="689655"/>
+                </a:lnTo>
+                <a:lnTo>
+                  <a:pt x="2793744" y="685418"/>
+                </a:lnTo>
+                <a:lnTo>
+                  <a:pt x="2823152" y="681137"/>
+                </a:lnTo>
+                <a:lnTo>
+                  <a:pt x="2852560" y="676810"/>
+                </a:lnTo>
+                <a:lnTo>
+                  <a:pt x="2881968" y="672439"/>
+                </a:lnTo>
+                <a:lnTo>
+                  <a:pt x="2911376" y="668023"/>
+                </a:lnTo>
+                <a:lnTo>
+                  <a:pt x="2940783" y="663562"/>
+                </a:lnTo>
+                <a:lnTo>
+                  <a:pt x="2970191" y="659056"/>
+                </a:lnTo>
+                <a:lnTo>
+                  <a:pt x="2999599" y="654506"/>
+                </a:lnTo>
+                <a:lnTo>
+                  <a:pt x="3029007" y="649910"/>
+                </a:lnTo>
+                <a:lnTo>
+                  <a:pt x="3058415" y="645270"/>
+                </a:lnTo>
+                <a:lnTo>
+                  <a:pt x="3087823" y="640585"/>
+                </a:lnTo>
+                <a:lnTo>
+                  <a:pt x="3117230" y="635855"/>
+                </a:lnTo>
+                <a:lnTo>
+                  <a:pt x="3146638" y="631080"/>
+                </a:lnTo>
+                <a:lnTo>
+                  <a:pt x="3176046" y="626260"/>
+                </a:lnTo>
+                <a:lnTo>
+                  <a:pt x="3205454" y="621396"/>
+                </a:lnTo>
+                <a:lnTo>
+                  <a:pt x="3234862" y="616487"/>
+                </a:lnTo>
+                <a:lnTo>
+                  <a:pt x="3264270" y="611532"/>
+                </a:lnTo>
+                <a:lnTo>
+                  <a:pt x="3293677" y="606533"/>
+                </a:lnTo>
+                <a:lnTo>
+                  <a:pt x="3323085" y="601490"/>
+                </a:lnTo>
+                <a:lnTo>
+                  <a:pt x="3352493" y="596401"/>
+                </a:lnTo>
+                <a:lnTo>
+                  <a:pt x="3381901" y="591268"/>
+                </a:lnTo>
+                <a:lnTo>
+                  <a:pt x="3411309" y="586089"/>
+                </a:lnTo>
+                <a:lnTo>
+                  <a:pt x="3440717" y="580866"/>
+                </a:lnTo>
+                <a:lnTo>
+                  <a:pt x="3470125" y="575598"/>
+                </a:lnTo>
+                <a:lnTo>
+                  <a:pt x="3499532" y="570285"/>
+                </a:lnTo>
+                <a:lnTo>
+                  <a:pt x="3528940" y="564928"/>
+                </a:lnTo>
+                <a:lnTo>
+                  <a:pt x="3558348" y="559525"/>
+                </a:lnTo>
+                <a:lnTo>
+                  <a:pt x="3587756" y="554078"/>
+                </a:lnTo>
+                <a:lnTo>
+                  <a:pt x="3617164" y="548586"/>
+                </a:lnTo>
+                <a:lnTo>
+                  <a:pt x="3646572" y="543049"/>
+                </a:lnTo>
+                <a:lnTo>
+                  <a:pt x="3675979" y="537467"/>
+                </a:lnTo>
+                <a:lnTo>
+                  <a:pt x="3705387" y="531840"/>
+                </a:lnTo>
+                <a:lnTo>
+                  <a:pt x="3734795" y="526169"/>
+                </a:lnTo>
+                <a:lnTo>
+                  <a:pt x="3764203" y="520453"/>
+                </a:lnTo>
+                <a:lnTo>
+                  <a:pt x="3793611" y="514692"/>
+                </a:lnTo>
+                <a:lnTo>
+                  <a:pt x="3823019" y="508886"/>
+                </a:lnTo>
+                <a:lnTo>
+                  <a:pt x="3852426" y="503035"/>
+                </a:lnTo>
+                <a:lnTo>
+                  <a:pt x="3881834" y="497139"/>
+                </a:lnTo>
+                <a:lnTo>
+                  <a:pt x="3911242" y="491199"/>
+                </a:lnTo>
+                <a:lnTo>
+                  <a:pt x="3940650" y="485213"/>
+                </a:lnTo>
+                <a:lnTo>
+                  <a:pt x="3970058" y="479183"/>
+                </a:lnTo>
+                <a:lnTo>
+                  <a:pt x="3999466" y="473108"/>
+                </a:lnTo>
+                <a:lnTo>
+                  <a:pt x="4028873" y="466988"/>
+                </a:lnTo>
+                <a:lnTo>
+                  <a:pt x="4058281" y="460824"/>
+                </a:lnTo>
+                <a:lnTo>
+                  <a:pt x="4087689" y="454614"/>
+                </a:lnTo>
+                <a:lnTo>
+                  <a:pt x="4117097" y="448360"/>
+                </a:lnTo>
+                <a:lnTo>
+                  <a:pt x="4146505" y="442061"/>
+                </a:lnTo>
+                <a:lnTo>
+                  <a:pt x="4175913" y="435717"/>
+                </a:lnTo>
+                <a:lnTo>
+                  <a:pt x="4205321" y="429328"/>
+                </a:lnTo>
+                <a:lnTo>
+                  <a:pt x="4234728" y="422895"/>
+                </a:lnTo>
+                <a:lnTo>
+                  <a:pt x="4264136" y="416416"/>
+                </a:lnTo>
+                <a:lnTo>
+                  <a:pt x="4293544" y="409893"/>
+                </a:lnTo>
+                <a:lnTo>
+                  <a:pt x="4322952" y="403325"/>
+                </a:lnTo>
+                <a:lnTo>
+                  <a:pt x="4352360" y="396712"/>
+                </a:lnTo>
+                <a:lnTo>
+                  <a:pt x="4381768" y="390054"/>
+                </a:lnTo>
+                <a:lnTo>
+                  <a:pt x="4411175" y="383351"/>
+                </a:lnTo>
+                <a:lnTo>
+                  <a:pt x="4440583" y="376604"/>
+                </a:lnTo>
+                <a:lnTo>
+                  <a:pt x="4469991" y="369811"/>
+                </a:lnTo>
+                <a:lnTo>
+                  <a:pt x="4499399" y="362974"/>
+                </a:lnTo>
+                <a:lnTo>
+                  <a:pt x="4528807" y="356092"/>
+                </a:lnTo>
+                <a:lnTo>
+                  <a:pt x="4558215" y="349165"/>
+                </a:lnTo>
+                <a:lnTo>
+                  <a:pt x="4587622" y="342194"/>
+                </a:lnTo>
+                <a:lnTo>
+                  <a:pt x="4617030" y="335177"/>
+                </a:lnTo>
+                <a:lnTo>
+                  <a:pt x="4646438" y="328116"/>
+                </a:lnTo>
+                <a:lnTo>
+                  <a:pt x="4675846" y="321010"/>
+                </a:lnTo>
+                <a:lnTo>
+                  <a:pt x="4705254" y="313859"/>
+                </a:lnTo>
+                <a:lnTo>
+                  <a:pt x="4734662" y="306663"/>
+                </a:lnTo>
+                <a:lnTo>
+                  <a:pt x="4764069" y="299422"/>
+                </a:lnTo>
+                <a:lnTo>
+                  <a:pt x="4793477" y="292137"/>
+                </a:lnTo>
+                <a:lnTo>
+                  <a:pt x="4822885" y="284807"/>
+                </a:lnTo>
+                <a:lnTo>
+                  <a:pt x="4852293" y="277432"/>
+                </a:lnTo>
+                <a:lnTo>
+                  <a:pt x="4881701" y="270012"/>
+                </a:lnTo>
+                <a:lnTo>
+                  <a:pt x="4911109" y="262547"/>
+                </a:lnTo>
+                <a:lnTo>
+                  <a:pt x="4940516" y="255037"/>
+                </a:lnTo>
+                <a:lnTo>
+                  <a:pt x="4969924" y="247483"/>
+                </a:lnTo>
+                <a:lnTo>
+                  <a:pt x="4999332" y="239883"/>
+                </a:lnTo>
+                <a:lnTo>
+                  <a:pt x="5028740" y="232239"/>
+                </a:lnTo>
+                <a:lnTo>
+                  <a:pt x="5058148" y="224550"/>
+                </a:lnTo>
+                <a:lnTo>
+                  <a:pt x="5087556" y="216816"/>
+                </a:lnTo>
+                <a:lnTo>
+                  <a:pt x="5116964" y="209038"/>
+                </a:lnTo>
+                <a:lnTo>
+                  <a:pt x="5146371" y="201214"/>
+                </a:lnTo>
+                <a:lnTo>
+                  <a:pt x="5175779" y="193346"/>
+                </a:lnTo>
+                <a:lnTo>
+                  <a:pt x="5205187" y="185433"/>
+                </a:lnTo>
+                <a:lnTo>
+                  <a:pt x="5234595" y="177475"/>
+                </a:lnTo>
+                <a:lnTo>
+                  <a:pt x="5264003" y="169472"/>
+                </a:lnTo>
+                <a:lnTo>
+                  <a:pt x="5293411" y="161424"/>
+                </a:lnTo>
+                <a:lnTo>
+                  <a:pt x="5322818" y="153332"/>
+                </a:lnTo>
+                <a:lnTo>
+                  <a:pt x="5352226" y="145194"/>
+                </a:lnTo>
+                <a:lnTo>
+                  <a:pt x="5381634" y="137012"/>
+                </a:lnTo>
+                <a:lnTo>
+                  <a:pt x="5411042" y="128785"/>
+                </a:lnTo>
+                <a:lnTo>
+                  <a:pt x="5440450" y="120514"/>
+                </a:lnTo>
+                <a:lnTo>
+                  <a:pt x="5469858" y="112197"/>
+                </a:lnTo>
+                <a:lnTo>
+                  <a:pt x="5499265" y="103835"/>
+                </a:lnTo>
+                <a:lnTo>
+                  <a:pt x="5528673" y="95429"/>
+                </a:lnTo>
+                <a:lnTo>
+                  <a:pt x="5558081" y="86978"/>
+                </a:lnTo>
+                <a:lnTo>
+                  <a:pt x="5587489" y="78482"/>
+                </a:lnTo>
+                <a:lnTo>
+                  <a:pt x="5616897" y="69941"/>
+                </a:lnTo>
+                <a:lnTo>
+                  <a:pt x="5646305" y="61355"/>
+                </a:lnTo>
+                <a:lnTo>
+                  <a:pt x="5675712" y="52725"/>
+                </a:lnTo>
+                <a:lnTo>
+                  <a:pt x="5705120" y="44050"/>
+                </a:lnTo>
+                <a:lnTo>
+                  <a:pt x="5734528" y="35329"/>
+                </a:lnTo>
+                <a:lnTo>
+                  <a:pt x="5763936" y="26564"/>
+                </a:lnTo>
+                <a:lnTo>
+                  <a:pt x="5793344" y="17755"/>
+                </a:lnTo>
+                <a:lnTo>
+                  <a:pt x="5822752" y="8900"/>
+                </a:lnTo>
+                <a:lnTo>
+                  <a:pt x="5852160" y="0"/>
+                </a:lnTo>
+              </a:path>
+            </a:pathLst>
+          </a:custGeom>
+          <a:noFill/>
+          <a:ln w="38100">
+            <a:solidFill>
+              <a:srgbClr val="F28BA0"/>
+            </a:solidFill>
+          </a:ln>
+          <a:effectLst/>
+        </p:spPr>
+        <p:txBody>
+          <a:bodyPr rtlCol="0" anchor="ctr"/>
+          <a:lstStyle/>
+          <a:p>
+            <a:pPr algn="ctr"/>
+          </a:p>
+        </p:txBody>
+      </p:sp>
+      <p:cxnSp>
+        <p:nvCxnSpPr>
+          <p:cNvPr id="37" name="C4-E30 line 35" descr="sci-ppt:o035"/>
+          <p:cNvCxnSpPr/>
+          <p:nvPr/>
+        </p:nvCxnSpPr>
+        <p:spPr>
+          <a:xfrm>
+            <a:off x="914400" y="3809999"/>
+            <a:ext cx="5852160" cy="0"/>
+          </a:xfrm>
+          <a:prstGeom prst="line">
+            <a:avLst/>
+          </a:prstGeom>
+          <a:ln w="16510">
+            <a:solidFill>
+              <a:srgbClr val="F2B880"/>
+            </a:solidFill>
+            <a:prstDash val="dash"/>
+          </a:ln>
+          <a:effectLst/>
+        </p:spPr>
+      </p:cxnSp>
+      <p:sp>
+        <p:nvSpPr>
+          <p:cNvPr id="38" name="C4-E30 text 36" descr="sci-ppt:o036"/>
           <p:cNvSpPr txBox="1"/>
           <p:nvPr/>
         </p:nvSpPr>
         <p:spPr>
           <a:xfrm>
-            <a:off x="6217920" y="4096512"/>
-            <a:ext cx="5715000" cy="246888"/>
+            <a:off x="1221638" y="3322320"/>
+            <a:ext cx="2194560" cy="223900"/>
           </a:xfrm>
           <a:prstGeom prst="rect">
             <a:avLst/>
@@ -3520,7 +5355,7 @@
           <a:effectLst/>
         </p:spPr>
         <p:txBody>
-          <a:bodyPr wrap="square" lIns="27432" rIns="27432" tIns="18288" bIns="18288" anchor="ctr">
+          <a:bodyPr wrap="none" lIns="18288" rIns="18288" tIns="18288" bIns="18288" anchor="t">
             <a:spAutoFit/>
           </a:bodyPr>
           <a:lstStyle/>
@@ -3533,25 +5368,25 @@
             <a:r>
               <a:rPr sz="1150" b="0" i="0">
                 <a:solidFill>
-                  <a:srgbClr val="B4C7D2"/>
+                  <a:srgbClr val="F2B880"/>
                 </a:solidFill>
                 <a:latin typeface="Arial"/>
               </a:rPr>
-              <a:t>• ΓA_f → full release cost</a:t>
-            </a:r>
-          </a:p>
-        </p:txBody>
-      </p:sp>
-      <p:sp>
-        <p:nvSpPr>
-          <p:cNvPr id="15" name="C4-E30 text 13" descr="sci-ppt:o013"/>
+              <a:t>E_solid = 10 nJ (budget)</a:t>
+            </a:r>
+          </a:p>
+        </p:txBody>
+      </p:sp>
+      <p:sp>
+        <p:nvSpPr>
+          <p:cNvPr id="39" name="C4-E30 text 37" descr="sci-ppt:o037"/>
           <p:cNvSpPr txBox="1"/>
           <p:nvPr/>
         </p:nvSpPr>
         <p:spPr>
           <a:xfrm>
-            <a:off x="320040" y="4329684"/>
-            <a:ext cx="5715000" cy="246888"/>
+            <a:off x="4264761" y="4181856"/>
+            <a:ext cx="2743200" cy="223900"/>
           </a:xfrm>
           <a:prstGeom prst="rect">
             <a:avLst/>
@@ -3560,167 +5395,7 @@
           <a:effectLst/>
         </p:spPr>
         <p:txBody>
-          <a:bodyPr wrap="square" lIns="27432" rIns="27432" tIns="18288" bIns="18288" anchor="ctr">
-            <a:spAutoFit/>
-          </a:bodyPr>
-          <a:lstStyle/>
-          <a:p>
-            <a:pPr algn="l">
-              <a:spcAft>
-                <a:spcPts val="0"/>
-              </a:spcAft>
-            </a:pPr>
-            <a:r>
-              <a:rPr sz="1150" b="0" i="0">
-                <a:solidFill>
-                  <a:srgbClr val="B4C7D2"/>
-                </a:solidFill>
-                <a:latin typeface="Arial"/>
-              </a:rPr>
-              <a:t>• ½m_f v_f² → departure kinetic energy</a:t>
-            </a:r>
-          </a:p>
-        </p:txBody>
-      </p:sp>
-      <p:sp>
-        <p:nvSpPr>
-          <p:cNvPr id="16" name="C4-E30 text 14" descr="sci-ppt:o014"/>
-          <p:cNvSpPr txBox="1"/>
-          <p:nvPr/>
-        </p:nvSpPr>
-        <p:spPr>
-          <a:xfrm>
-            <a:off x="6217920" y="4329684"/>
-            <a:ext cx="5715000" cy="246888"/>
-          </a:xfrm>
-          <a:prstGeom prst="rect">
-            <a:avLst/>
-          </a:prstGeom>
-          <a:noFill/>
-          <a:effectLst/>
-        </p:spPr>
-        <p:txBody>
-          <a:bodyPr wrap="square" lIns="27432" rIns="27432" tIns="18288" bIns="18288" anchor="ctr">
-            <a:spAutoFit/>
-          </a:bodyPr>
-          <a:lstStyle/>
-          <a:p>
-            <a:pPr algn="l">
-              <a:spcAft>
-                <a:spcPts val="0"/>
-              </a:spcAft>
-            </a:pPr>
-            <a:r>
-              <a:rPr sz="1150" b="0" i="0">
-                <a:solidFill>
-                  <a:srgbClr val="B4C7D2"/>
-                </a:solidFill>
-                <a:latin typeface="Arial"/>
-              </a:rPr>
-              <a:t>• I_net → net opening impulse</a:t>
-            </a:r>
-          </a:p>
-        </p:txBody>
-      </p:sp>
-      <p:sp>
-        <p:nvSpPr>
-          <p:cNvPr id="17" name="C4-E30 text 15" descr="sci-ppt:o015"/>
-          <p:cNvSpPr txBox="1"/>
-          <p:nvPr/>
-        </p:nvSpPr>
-        <p:spPr>
-          <a:xfrm>
-            <a:off x="320040" y="4562856"/>
-            <a:ext cx="5715000" cy="246888"/>
-          </a:xfrm>
-          <a:prstGeom prst="rect">
-            <a:avLst/>
-          </a:prstGeom>
-          <a:noFill/>
-          <a:effectLst/>
-        </p:spPr>
-        <p:txBody>
-          <a:bodyPr wrap="square" lIns="27432" rIns="27432" tIns="18288" bIns="18288" anchor="ctr">
-            <a:spAutoFit/>
-          </a:bodyPr>
-          <a:lstStyle/>
-          <a:p>
-            <a:pPr algn="l">
-              <a:spcAft>
-                <a:spcPts val="0"/>
-              </a:spcAft>
-            </a:pPr>
-            <a:r>
-              <a:rPr sz="1150" b="0" i="0">
-                <a:solidFill>
-                  <a:srgbClr val="B4C7D2"/>
-                </a:solidFill>
-                <a:latin typeface="Arial"/>
-              </a:rPr>
-              <a:t>• m_f v_f → required momentum</a:t>
-            </a:r>
-          </a:p>
-        </p:txBody>
-      </p:sp>
-      <p:sp>
-        <p:nvSpPr>
-          <p:cNvPr id="18" name="C4-E30 text 16" descr="sci-ppt:o016"/>
-          <p:cNvSpPr txBox="1"/>
-          <p:nvPr/>
-        </p:nvSpPr>
-        <p:spPr>
-          <a:xfrm>
-            <a:off x="6217920" y="4562856"/>
-            <a:ext cx="5715000" cy="246888"/>
-          </a:xfrm>
-          <a:prstGeom prst="rect">
-            <a:avLst/>
-          </a:prstGeom>
-          <a:noFill/>
-          <a:effectLst/>
-        </p:spPr>
-        <p:txBody>
-          <a:bodyPr wrap="square" lIns="27432" rIns="27432" tIns="18288" bIns="18288" anchor="ctr">
-            <a:spAutoFit/>
-          </a:bodyPr>
-          <a:lstStyle/>
-          <a:p>
-            <a:pPr algn="l">
-              <a:spcAft>
-                <a:spcPts val="0"/>
-              </a:spcAft>
-            </a:pPr>
-            <a:r>
-              <a:rPr sz="1150" b="0" i="0">
-                <a:solidFill>
-                  <a:srgbClr val="B4C7D2"/>
-                </a:solidFill>
-                <a:latin typeface="Arial"/>
-              </a:rPr>
-              <a:t>• E_req, I_req — minimum screens</a:t>
-            </a:r>
-          </a:p>
-        </p:txBody>
-      </p:sp>
-      <p:sp>
-        <p:nvSpPr>
-          <p:cNvPr id="19" name="C4-E30 text 17" descr="sci-ppt:o017"/>
-          <p:cNvSpPr txBox="1"/>
-          <p:nvPr/>
-        </p:nvSpPr>
-        <p:spPr>
-          <a:xfrm>
-            <a:off x="320040" y="5596128"/>
-            <a:ext cx="11430000" cy="292608"/>
-          </a:xfrm>
-          <a:prstGeom prst="rect">
-            <a:avLst/>
-          </a:prstGeom>
-          <a:noFill/>
-          <a:effectLst/>
-        </p:spPr>
-        <p:txBody>
-          <a:bodyPr wrap="square" lIns="27432" rIns="27432" tIns="18288" bIns="18288" anchor="ctr">
+          <a:bodyPr wrap="none" lIns="18288" rIns="18288" tIns="18288" bIns="18288" anchor="t">
             <a:spAutoFit/>
           </a:bodyPr>
           <a:lstStyle/>
@@ -3737,21 +5412,21 @@
                 </a:solidFill>
                 <a:latin typeface="Arial"/>
               </a:rPr>
-              <a:t>Passing is necessary, not sufficient.</a:t>
-            </a:r>
-          </a:p>
-        </p:txBody>
-      </p:sp>
-      <p:sp>
-        <p:nvSpPr>
-          <p:cNvPr id="20" name="C4-E30 text 18" descr="sci-ppt:o018"/>
+              <a:t>Γ = 0.005 J/m²: Γ A_f = 5 nJ</a:t>
+            </a:r>
+          </a:p>
+        </p:txBody>
+      </p:sp>
+      <p:sp>
+        <p:nvSpPr>
+          <p:cNvPr id="40" name="C4-E30 text 38" descr="sci-ppt:o038"/>
           <p:cNvSpPr txBox="1"/>
           <p:nvPr/>
         </p:nvSpPr>
         <p:spPr>
           <a:xfrm>
-            <a:off x="320040" y="5870448"/>
-            <a:ext cx="11430000" cy="292608"/>
+            <a:off x="1104595" y="1676400"/>
+            <a:ext cx="2743200" cy="223900"/>
           </a:xfrm>
           <a:prstGeom prst="rect">
             <a:avLst/>
@@ -3760,7 +5435,7 @@
           <a:effectLst/>
         </p:spPr>
         <p:txBody>
-          <a:bodyPr wrap="square" lIns="27432" rIns="27432" tIns="18288" bIns="18288" anchor="ctr">
+          <a:bodyPr wrap="none" lIns="18288" rIns="18288" tIns="18288" bIns="18288" anchor="t">
             <a:spAutoFit/>
           </a:bodyPr>
           <a:lstStyle/>
@@ -3773,25 +5448,57 @@
             <a:r>
               <a:rPr sz="1150" b="0" i="0">
                 <a:solidFill>
-                  <a:srgbClr val="8EDBD4"/>
+                  <a:srgbClr val="F28BA0"/>
                 </a:solidFill>
                 <a:latin typeface="Arial"/>
               </a:rPr>
-              <a:t>Support reactions are already included in net impulse.</a:t>
-            </a:r>
-          </a:p>
-        </p:txBody>
-      </p:sp>
-      <p:sp>
-        <p:nvSpPr>
-          <p:cNvPr id="21" name="C4-E30 text 19" descr="sci-ppt:o019"/>
+              <a:t>Γ = 0.020 J/m²: Γ A_f = 20 nJ</a:t>
+            </a:r>
+          </a:p>
+        </p:txBody>
+      </p:sp>
+      <p:sp>
+        <p:nvSpPr>
+          <p:cNvPr id="41" name="C4-E30 round_rect 39" descr="sci-ppt:o039"/>
+          <p:cNvSpPr/>
+          <p:nvPr/>
+        </p:nvSpPr>
+        <p:spPr>
+          <a:xfrm>
+            <a:off x="7040880" y="1371600"/>
+            <a:ext cx="4800600" cy="3657600"/>
+          </a:xfrm>
+          <a:prstGeom prst="roundRect">
+            <a:avLst/>
+          </a:prstGeom>
+          <a:solidFill>
+            <a:srgbClr val="213E4B"/>
+          </a:solidFill>
+          <a:ln w="20320">
+            <a:solidFill>
+              <a:srgbClr val="8EDBD4"/>
+            </a:solidFill>
+          </a:ln>
+          <a:effectLst/>
+        </p:spPr>
+        <p:txBody>
+          <a:bodyPr rtlCol="0" anchor="ctr"/>
+          <a:lstStyle/>
+          <a:p>
+            <a:pPr algn="ctr"/>
+          </a:p>
+        </p:txBody>
+      </p:sp>
+      <p:sp>
+        <p:nvSpPr>
+          <p:cNvPr id="42" name="C4-E30 text 40" descr="sci-ppt:o040"/>
           <p:cNvSpPr txBox="1"/>
           <p:nvPr/>
         </p:nvSpPr>
         <p:spPr>
           <a:xfrm>
-            <a:off x="320040" y="6473952"/>
-            <a:ext cx="11430000" cy="256032"/>
+            <a:off x="7150608" y="1426464"/>
+            <a:ext cx="4581144" cy="254889"/>
           </a:xfrm>
           <a:prstGeom prst="rect">
             <a:avLst/>
@@ -3800,7 +5507,263 @@
           <a:effectLst/>
         </p:spPr>
         <p:txBody>
-          <a:bodyPr wrap="square" lIns="27432" rIns="27432" tIns="18288" bIns="18288" anchor="ctr">
+          <a:bodyPr wrap="none" lIns="18288" rIns="18288" tIns="18288" bIns="18288" anchor="t">
+            <a:spAutoFit/>
+          </a:bodyPr>
+          <a:lstStyle/>
+          <a:p>
+            <a:pPr algn="l">
+              <a:spcAft>
+                <a:spcPts val="0"/>
+              </a:spcAft>
+            </a:pPr>
+            <a:r>
+              <a:rPr sz="1350" b="1" i="0">
+                <a:solidFill>
+                  <a:srgbClr val="8EDBD4"/>
+                </a:solidFill>
+                <a:latin typeface="Arial"/>
+              </a:rPr>
+              <a:t>Necessary, not sufficient</a:t>
+            </a:r>
+          </a:p>
+        </p:txBody>
+      </p:sp>
+      <p:sp>
+        <p:nvSpPr>
+          <p:cNvPr id="43" name="C4-E30 text 41" descr="sci-ppt:o041"/>
+          <p:cNvSpPr txBox="1"/>
+          <p:nvPr/>
+        </p:nvSpPr>
+        <p:spPr>
+          <a:xfrm>
+            <a:off x="7178040" y="1828800"/>
+            <a:ext cx="4572000" cy="247142"/>
+          </a:xfrm>
+          <a:prstGeom prst="rect">
+            <a:avLst/>
+          </a:prstGeom>
+          <a:noFill/>
+          <a:effectLst/>
+        </p:spPr>
+        <p:txBody>
+          <a:bodyPr wrap="none" lIns="18288" rIns="18288" tIns="18288" bIns="18288" anchor="t">
+            <a:spAutoFit/>
+          </a:bodyPr>
+          <a:lstStyle/>
+          <a:p>
+            <a:pPr algn="l">
+              <a:spcAft>
+                <a:spcPts val="0"/>
+              </a:spcAft>
+            </a:pPr>
+            <a:r>
+              <a:rPr sz="1300" b="1" i="0">
+                <a:solidFill>
+                  <a:srgbClr val="E7F0F3"/>
+                </a:solidFill>
+                <a:latin typeface="Arial"/>
+              </a:rPr>
+              <a:t>E_req(v_f) = Γ A_f + ½ m_f v_f²</a:t>
+            </a:r>
+          </a:p>
+        </p:txBody>
+      </p:sp>
+      <p:sp>
+        <p:nvSpPr>
+          <p:cNvPr id="44" name="C4-E30 text 42" descr="sci-ppt:o042"/>
+          <p:cNvSpPr txBox="1"/>
+          <p:nvPr/>
+        </p:nvSpPr>
+        <p:spPr>
+          <a:xfrm>
+            <a:off x="7178040" y="2286000"/>
+            <a:ext cx="4572000" cy="247142"/>
+          </a:xfrm>
+          <a:prstGeom prst="rect">
+            <a:avLst/>
+          </a:prstGeom>
+          <a:noFill/>
+          <a:effectLst/>
+        </p:spPr>
+        <p:txBody>
+          <a:bodyPr wrap="none" lIns="18288" rIns="18288" tIns="18288" bIns="18288" anchor="t">
+            <a:spAutoFit/>
+          </a:bodyPr>
+          <a:lstStyle/>
+          <a:p>
+            <a:pPr algn="l">
+              <a:spcAft>
+                <a:spcPts val="0"/>
+              </a:spcAft>
+            </a:pPr>
+            <a:r>
+              <a:rPr sz="1300" b="1" i="0">
+                <a:solidFill>
+                  <a:srgbClr val="E7F0F3"/>
+                </a:solidFill>
+                <a:latin typeface="Arial"/>
+              </a:rPr>
+              <a:t>I_req(v_f) = m_f v_f</a:t>
+            </a:r>
+          </a:p>
+        </p:txBody>
+      </p:sp>
+      <p:sp>
+        <p:nvSpPr>
+          <p:cNvPr id="45" name="C4-E30 text 43" descr="sci-ppt:o043"/>
+          <p:cNvSpPr txBox="1"/>
+          <p:nvPr/>
+        </p:nvSpPr>
+        <p:spPr>
+          <a:xfrm>
+            <a:off x="7178040" y="2834640"/>
+            <a:ext cx="4572000" cy="239395"/>
+          </a:xfrm>
+          <a:prstGeom prst="rect">
+            <a:avLst/>
+          </a:prstGeom>
+          <a:noFill/>
+          <a:effectLst/>
+        </p:spPr>
+        <p:txBody>
+          <a:bodyPr wrap="none" lIns="18288" rIns="18288" tIns="18288" bIns="18288" anchor="t">
+            <a:spAutoFit/>
+          </a:bodyPr>
+          <a:lstStyle/>
+          <a:p>
+            <a:pPr algn="l">
+              <a:spcAft>
+                <a:spcPts val="0"/>
+              </a:spcAft>
+            </a:pPr>
+            <a:r>
+              <a:rPr sz="1250" b="1" i="0">
+                <a:solidFill>
+                  <a:srgbClr val="F2B880"/>
+                </a:solidFill>
+                <a:latin typeface="Arial"/>
+              </a:rPr>
+              <a:t>pass:  E_solid ≥ E_req  and  Iₙₑₜ ≥ I_req</a:t>
+            </a:r>
+          </a:p>
+        </p:txBody>
+      </p:sp>
+      <p:sp>
+        <p:nvSpPr>
+          <p:cNvPr id="46" name="C4-E30 text 44" descr="sci-ppt:o044"/>
+          <p:cNvSpPr txBox="1"/>
+          <p:nvPr/>
+        </p:nvSpPr>
+        <p:spPr>
+          <a:xfrm>
+            <a:off x="7178040" y="3474720"/>
+            <a:ext cx="4572000" cy="417576"/>
+          </a:xfrm>
+          <a:prstGeom prst="rect">
+            <a:avLst/>
+          </a:prstGeom>
+          <a:noFill/>
+          <a:effectLst/>
+        </p:spPr>
+        <p:txBody>
+          <a:bodyPr wrap="none" lIns="18288" rIns="18288" tIns="18288" bIns="18288" anchor="t">
+            <a:spAutoFit/>
+          </a:bodyPr>
+          <a:lstStyle/>
+          <a:p>
+            <a:pPr algn="l">
+              <a:spcAft>
+                <a:spcPts val="0"/>
+              </a:spcAft>
+            </a:pPr>
+            <a:r>
+              <a:rPr sz="1200" b="0" i="0">
+                <a:solidFill>
+                  <a:srgbClr val="B4C7D2"/>
+                </a:solidFill>
+                <a:latin typeface="Arial"/>
+              </a:rPr>
+              <a:t>The whole release area A_f, not a pressure peak, sets</a:t>
+            </a:r>
+          </a:p>
+          <a:p>
+            <a:pPr algn="l">
+              <a:spcAft>
+                <a:spcPts val="0"/>
+              </a:spcAft>
+            </a:pPr>
+            <a:r>
+              <a:rPr sz="1200" b="0" i="0">
+                <a:solidFill>
+                  <a:srgbClr val="B4C7D2"/>
+                </a:solidFill>
+                <a:latin typeface="Arial"/>
+              </a:rPr>
+              <a:t>the fracture energy cost.</a:t>
+            </a:r>
+          </a:p>
+        </p:txBody>
+      </p:sp>
+      <p:sp>
+        <p:nvSpPr>
+          <p:cNvPr id="47" name="C4-E30 text 45" descr="sci-ppt:o045"/>
+          <p:cNvSpPr txBox="1"/>
+          <p:nvPr/>
+        </p:nvSpPr>
+        <p:spPr>
+          <a:xfrm>
+            <a:off x="914400" y="5733288"/>
+            <a:ext cx="10972800" cy="239395"/>
+          </a:xfrm>
+          <a:prstGeom prst="rect">
+            <a:avLst/>
+          </a:prstGeom>
+          <a:noFill/>
+          <a:effectLst/>
+        </p:spPr>
+        <p:txBody>
+          <a:bodyPr wrap="none" lIns="18288" rIns="18288" tIns="18288" bIns="18288" anchor="t">
+            <a:spAutoFit/>
+          </a:bodyPr>
+          <a:lstStyle/>
+          <a:p>
+            <a:pPr algn="l">
+              <a:spcAft>
+                <a:spcPts val="0"/>
+              </a:spcAft>
+            </a:pPr>
+            <a:r>
+              <a:rPr sz="1250" b="0" i="0">
+                <a:solidFill>
+                  <a:srgbClr val="E7F0F3"/>
+                </a:solidFill>
+                <a:latin typeface="Arial"/>
+              </a:rPr>
+              <a:t>Energy to open the interface (Γ A_f) plus energy to move the released film (½ m_f v_f²).</a:t>
+            </a:r>
+          </a:p>
+        </p:txBody>
+      </p:sp>
+      <p:sp>
+        <p:nvSpPr>
+          <p:cNvPr id="48" name="C4-E30 text 46" descr="sci-ppt:o046"/>
+          <p:cNvSpPr txBox="1"/>
+          <p:nvPr/>
+        </p:nvSpPr>
+        <p:spPr>
+          <a:xfrm>
+            <a:off x="320040" y="6510528"/>
+            <a:ext cx="11521440" cy="200660"/>
+          </a:xfrm>
+          <a:prstGeom prst="rect">
+            <a:avLst/>
+          </a:prstGeom>
+          <a:noFill/>
+          <a:effectLst/>
+        </p:spPr>
+        <p:txBody>
+          <a:bodyPr wrap="none" lIns="18288" rIns="18288" tIns="18288" bIns="18288" anchor="t">
             <a:spAutoFit/>
           </a:bodyPr>
           <a:lstStyle/>
@@ -3817,7 +5780,7 @@
                 </a:solidFill>
                 <a:latin typeface="Arial"/>
               </a:rPr>
-              <a:t>Model schematic; geometry is not to scale.</a:t>
+              <a:t>Global screens of Eq. C4-E30 (A_f = 1 mm², m_f = 2.33 µg).</a:t>
             </a:r>
           </a:p>
         </p:txBody>
